--- a/주제탐구 제안서/포스터_모식도.pptx
+++ b/주제탐구 제안서/포스터_모식도.pptx
@@ -4,15 +4,18 @@
   <p:sldMasterIdLst>
     <p:sldMasterId id="2147483648" r:id="rId1"/>
   </p:sldMasterIdLst>
+  <p:notesMasterIdLst>
+    <p:notesMasterId r:id="rId8"/>
+  </p:notesMasterIdLst>
   <p:sldIdLst>
-    <p:sldId id="256" r:id="rId7"/>
-    <p:sldId id="257" r:id="rId8"/>
-    <p:sldId id="258" r:id="rId9"/>
-    <p:sldId id="259" r:id="rId10"/>
-    <p:sldId id="260" r:id="rId11"/>
-    <p:sldId id="261" r:id="rId12"/>
+    <p:sldId id="256" r:id="rId2"/>
+    <p:sldId id="257" r:id="rId3"/>
+    <p:sldId id="258" r:id="rId4"/>
+    <p:sldId id="259" r:id="rId5"/>
+    <p:sldId id="260" r:id="rId6"/>
+    <p:sldId id="261" r:id="rId7"/>
   </p:sldIdLst>
-  <p:sldSz cx="4063898" cy="2286000" type="screen4x3"/>
+  <p:sldSz cx="4064000" cy="2286000"/>
   <p:notesSz cx="6858000" cy="9144000"/>
   <p:defaultTextStyle>
     <a:defPPr>
@@ -109,7 +112,456 @@
       </a:defRPr>
     </a:lvl9pPr>
   </p:defaultTextStyle>
+  <p:extLst>
+    <p:ext uri="{EFAFB233-063F-42B5-8137-9DF3F51BA10A}">
+      <p15:sldGuideLst xmlns:p15="http://schemas.microsoft.com/office/powerpoint/2012/main">
+        <p15:guide id="1" orient="horz" pos="2160">
+          <p15:clr>
+            <a:srgbClr val="A4A3A4"/>
+          </p15:clr>
+        </p15:guide>
+        <p15:guide id="2" pos="2880">
+          <p15:clr>
+            <a:srgbClr val="A4A3A4"/>
+          </p15:clr>
+        </p15:guide>
+      </p15:sldGuideLst>
+    </p:ext>
+  </p:extLst>
 </p:presentation>
+</file>
+
+<file path=ppt/notesMasters/notesMaster1.xml><?xml version="1.0" encoding="utf-8"?>
+<p:notesMaster xmlns:a="http://schemas.openxmlformats.org/drawingml/2006/main" xmlns:r="http://schemas.openxmlformats.org/officeDocument/2006/relationships" xmlns:p="http://schemas.openxmlformats.org/presentationml/2006/main">
+  <p:cSld>
+    <p:bg>
+      <p:bgRef idx="1001">
+        <a:schemeClr val="bg1"/>
+      </p:bgRef>
+    </p:bg>
+    <p:spTree>
+      <p:nvGrpSpPr>
+        <p:cNvPr id="1" name=""/>
+        <p:cNvGrpSpPr/>
+        <p:nvPr/>
+      </p:nvGrpSpPr>
+      <p:grpSpPr>
+        <a:xfrm>
+          <a:off x="0" y="0"/>
+          <a:ext cx="0" cy="0"/>
+          <a:chOff x="0" y="0"/>
+          <a:chExt cx="0" cy="0"/>
+        </a:xfrm>
+      </p:grpSpPr>
+      <p:sp>
+        <p:nvSpPr>
+          <p:cNvPr id="2" name="머리글 개체 틀 1"/>
+          <p:cNvSpPr>
+            <a:spLocks noGrp="1"/>
+          </p:cNvSpPr>
+          <p:nvPr>
+            <p:ph type="hdr" sz="quarter"/>
+          </p:nvPr>
+        </p:nvSpPr>
+        <p:spPr>
+          <a:xfrm>
+            <a:off x="0" y="0"/>
+            <a:ext cx="2971800" cy="458788"/>
+          </a:xfrm>
+          <a:prstGeom prst="rect">
+            <a:avLst/>
+          </a:prstGeom>
+        </p:spPr>
+        <p:txBody>
+          <a:bodyPr vert="horz" lIns="91440" tIns="45720" rIns="91440" bIns="45720" rtlCol="0"/>
+          <a:lstStyle>
+            <a:lvl1pPr algn="l">
+              <a:defRPr sz="1200"/>
+            </a:lvl1pPr>
+          </a:lstStyle>
+          <a:p>
+            <a:endParaRPr kumimoji="1" lang="ko-KR" altLang="en-US"/>
+          </a:p>
+        </p:txBody>
+      </p:sp>
+      <p:sp>
+        <p:nvSpPr>
+          <p:cNvPr id="3" name="날짜 개체 틀 2"/>
+          <p:cNvSpPr>
+            <a:spLocks noGrp="1"/>
+          </p:cNvSpPr>
+          <p:nvPr>
+            <p:ph type="dt" idx="1"/>
+          </p:nvPr>
+        </p:nvSpPr>
+        <p:spPr>
+          <a:xfrm>
+            <a:off x="3884613" y="0"/>
+            <a:ext cx="2971800" cy="458788"/>
+          </a:xfrm>
+          <a:prstGeom prst="rect">
+            <a:avLst/>
+          </a:prstGeom>
+        </p:spPr>
+        <p:txBody>
+          <a:bodyPr vert="horz" lIns="91440" tIns="45720" rIns="91440" bIns="45720" rtlCol="0"/>
+          <a:lstStyle>
+            <a:lvl1pPr algn="r">
+              <a:defRPr sz="1200"/>
+            </a:lvl1pPr>
+          </a:lstStyle>
+          <a:p>
+            <a:fld id="{C245E68A-8B56-AE4C-AF74-44729FFD62DD}" type="datetimeFigureOut">
+              <a:rPr kumimoji="1" lang="ko-KR" altLang="en-US" smtClean="0"/>
+              <a:t>2026. 7. 2.</a:t>
+            </a:fld>
+            <a:endParaRPr kumimoji="1" lang="ko-KR" altLang="en-US"/>
+          </a:p>
+        </p:txBody>
+      </p:sp>
+      <p:sp>
+        <p:nvSpPr>
+          <p:cNvPr id="4" name="슬라이드 이미지 개체 틀 3"/>
+          <p:cNvSpPr>
+            <a:spLocks noGrp="1" noRot="1" noChangeAspect="1"/>
+          </p:cNvSpPr>
+          <p:nvPr>
+            <p:ph type="sldImg" idx="2"/>
+          </p:nvPr>
+        </p:nvSpPr>
+        <p:spPr>
+          <a:xfrm>
+            <a:off x="685800" y="1143000"/>
+            <a:ext cx="5486400" cy="3086100"/>
+          </a:xfrm>
+          <a:prstGeom prst="rect">
+            <a:avLst/>
+          </a:prstGeom>
+          <a:noFill/>
+          <a:ln w="12700">
+            <a:solidFill>
+              <a:prstClr val="black"/>
+            </a:solidFill>
+          </a:ln>
+        </p:spPr>
+        <p:txBody>
+          <a:bodyPr vert="horz" lIns="91440" tIns="45720" rIns="91440" bIns="45720" rtlCol="0" anchor="ctr"/>
+          <a:lstStyle/>
+          <a:p>
+            <a:endParaRPr lang="ko-KR" altLang="en-US"/>
+          </a:p>
+        </p:txBody>
+      </p:sp>
+      <p:sp>
+        <p:nvSpPr>
+          <p:cNvPr id="5" name="슬라이드 노트 개체 틀 4"/>
+          <p:cNvSpPr>
+            <a:spLocks noGrp="1"/>
+          </p:cNvSpPr>
+          <p:nvPr>
+            <p:ph type="body" sz="quarter" idx="3"/>
+          </p:nvPr>
+        </p:nvSpPr>
+        <p:spPr>
+          <a:xfrm>
+            <a:off x="685800" y="4400550"/>
+            <a:ext cx="5486400" cy="3600450"/>
+          </a:xfrm>
+          <a:prstGeom prst="rect">
+            <a:avLst/>
+          </a:prstGeom>
+        </p:spPr>
+        <p:txBody>
+          <a:bodyPr vert="horz" lIns="91440" tIns="45720" rIns="91440" bIns="45720" rtlCol="0"/>
+          <a:lstStyle/>
+          <a:p>
+            <a:pPr lvl="0"/>
+            <a:r>
+              <a:rPr kumimoji="1" lang="ko-KR" altLang="en-US"/>
+              <a:t>마스터 텍스트 스타일을 편집하려면 클릭</a:t>
+            </a:r>
+          </a:p>
+          <a:p>
+            <a:pPr lvl="1"/>
+            <a:r>
+              <a:rPr kumimoji="1" lang="ko-KR" altLang="en-US"/>
+              <a:t>두 번째 수준</a:t>
+            </a:r>
+          </a:p>
+          <a:p>
+            <a:pPr lvl="2"/>
+            <a:r>
+              <a:rPr kumimoji="1" lang="ko-KR" altLang="en-US"/>
+              <a:t>세 번째 수준</a:t>
+            </a:r>
+          </a:p>
+          <a:p>
+            <a:pPr lvl="3"/>
+            <a:r>
+              <a:rPr kumimoji="1" lang="ko-KR" altLang="en-US"/>
+              <a:t>네 번째 수준</a:t>
+            </a:r>
+          </a:p>
+          <a:p>
+            <a:pPr lvl="4"/>
+            <a:r>
+              <a:rPr kumimoji="1" lang="ko-KR" altLang="en-US"/>
+              <a:t>다섯 번째 수준</a:t>
+            </a:r>
+          </a:p>
+        </p:txBody>
+      </p:sp>
+      <p:sp>
+        <p:nvSpPr>
+          <p:cNvPr id="6" name="바닥글 개체 틀 5"/>
+          <p:cNvSpPr>
+            <a:spLocks noGrp="1"/>
+          </p:cNvSpPr>
+          <p:nvPr>
+            <p:ph type="ftr" sz="quarter" idx="4"/>
+          </p:nvPr>
+        </p:nvSpPr>
+        <p:spPr>
+          <a:xfrm>
+            <a:off x="0" y="8685213"/>
+            <a:ext cx="2971800" cy="458787"/>
+          </a:xfrm>
+          <a:prstGeom prst="rect">
+            <a:avLst/>
+          </a:prstGeom>
+        </p:spPr>
+        <p:txBody>
+          <a:bodyPr vert="horz" lIns="91440" tIns="45720" rIns="91440" bIns="45720" rtlCol="0" anchor="b"/>
+          <a:lstStyle>
+            <a:lvl1pPr algn="l">
+              <a:defRPr sz="1200"/>
+            </a:lvl1pPr>
+          </a:lstStyle>
+          <a:p>
+            <a:endParaRPr kumimoji="1" lang="ko-KR" altLang="en-US"/>
+          </a:p>
+        </p:txBody>
+      </p:sp>
+      <p:sp>
+        <p:nvSpPr>
+          <p:cNvPr id="7" name="슬라이드 번호 개체 틀 6"/>
+          <p:cNvSpPr>
+            <a:spLocks noGrp="1"/>
+          </p:cNvSpPr>
+          <p:nvPr>
+            <p:ph type="sldNum" sz="quarter" idx="5"/>
+          </p:nvPr>
+        </p:nvSpPr>
+        <p:spPr>
+          <a:xfrm>
+            <a:off x="3884613" y="8685213"/>
+            <a:ext cx="2971800" cy="458787"/>
+          </a:xfrm>
+          <a:prstGeom prst="rect">
+            <a:avLst/>
+          </a:prstGeom>
+        </p:spPr>
+        <p:txBody>
+          <a:bodyPr vert="horz" lIns="91440" tIns="45720" rIns="91440" bIns="45720" rtlCol="0" anchor="b"/>
+          <a:lstStyle>
+            <a:lvl1pPr algn="r">
+              <a:defRPr sz="1200"/>
+            </a:lvl1pPr>
+          </a:lstStyle>
+          <a:p>
+            <a:fld id="{996C5B66-446E-5B46-89DC-F1BF4020301F}" type="slidenum">
+              <a:rPr kumimoji="1" lang="ko-KR" altLang="en-US" smtClean="0"/>
+              <a:t>‹#›</a:t>
+            </a:fld>
+            <a:endParaRPr kumimoji="1" lang="ko-KR" altLang="en-US"/>
+          </a:p>
+        </p:txBody>
+      </p:sp>
+    </p:spTree>
+    <p:extLst>
+      <p:ext uri="{BB962C8B-B14F-4D97-AF65-F5344CB8AC3E}">
+        <p14:creationId xmlns:p14="http://schemas.microsoft.com/office/powerpoint/2010/main" val="3943825442"/>
+      </p:ext>
+    </p:extLst>
+  </p:cSld>
+  <p:clrMap bg1="lt1" tx1="dk1" bg2="lt2" tx2="dk2" accent1="accent1" accent2="accent2" accent3="accent3" accent4="accent4" accent5="accent5" accent6="accent6" hlink="hlink" folHlink="folHlink"/>
+  <p:notesStyle>
+    <a:lvl1pPr marL="0" algn="l" defTabSz="914400" rtl="0" eaLnBrk="1" latinLnBrk="1" hangingPunct="1">
+      <a:defRPr sz="1200" kern="1200">
+        <a:solidFill>
+          <a:schemeClr val="tx1"/>
+        </a:solidFill>
+        <a:latin typeface="+mn-lt"/>
+        <a:ea typeface="+mn-ea"/>
+        <a:cs typeface="+mn-cs"/>
+      </a:defRPr>
+    </a:lvl1pPr>
+    <a:lvl2pPr marL="457200" algn="l" defTabSz="914400" rtl="0" eaLnBrk="1" latinLnBrk="1" hangingPunct="1">
+      <a:defRPr sz="1200" kern="1200">
+        <a:solidFill>
+          <a:schemeClr val="tx1"/>
+        </a:solidFill>
+        <a:latin typeface="+mn-lt"/>
+        <a:ea typeface="+mn-ea"/>
+        <a:cs typeface="+mn-cs"/>
+      </a:defRPr>
+    </a:lvl2pPr>
+    <a:lvl3pPr marL="914400" algn="l" defTabSz="914400" rtl="0" eaLnBrk="1" latinLnBrk="1" hangingPunct="1">
+      <a:defRPr sz="1200" kern="1200">
+        <a:solidFill>
+          <a:schemeClr val="tx1"/>
+        </a:solidFill>
+        <a:latin typeface="+mn-lt"/>
+        <a:ea typeface="+mn-ea"/>
+        <a:cs typeface="+mn-cs"/>
+      </a:defRPr>
+    </a:lvl3pPr>
+    <a:lvl4pPr marL="1371600" algn="l" defTabSz="914400" rtl="0" eaLnBrk="1" latinLnBrk="1" hangingPunct="1">
+      <a:defRPr sz="1200" kern="1200">
+        <a:solidFill>
+          <a:schemeClr val="tx1"/>
+        </a:solidFill>
+        <a:latin typeface="+mn-lt"/>
+        <a:ea typeface="+mn-ea"/>
+        <a:cs typeface="+mn-cs"/>
+      </a:defRPr>
+    </a:lvl4pPr>
+    <a:lvl5pPr marL="1828800" algn="l" defTabSz="914400" rtl="0" eaLnBrk="1" latinLnBrk="1" hangingPunct="1">
+      <a:defRPr sz="1200" kern="1200">
+        <a:solidFill>
+          <a:schemeClr val="tx1"/>
+        </a:solidFill>
+        <a:latin typeface="+mn-lt"/>
+        <a:ea typeface="+mn-ea"/>
+        <a:cs typeface="+mn-cs"/>
+      </a:defRPr>
+    </a:lvl5pPr>
+    <a:lvl6pPr marL="2286000" algn="l" defTabSz="914400" rtl="0" eaLnBrk="1" latinLnBrk="1" hangingPunct="1">
+      <a:defRPr sz="1200" kern="1200">
+        <a:solidFill>
+          <a:schemeClr val="tx1"/>
+        </a:solidFill>
+        <a:latin typeface="+mn-lt"/>
+        <a:ea typeface="+mn-ea"/>
+        <a:cs typeface="+mn-cs"/>
+      </a:defRPr>
+    </a:lvl6pPr>
+    <a:lvl7pPr marL="2743200" algn="l" defTabSz="914400" rtl="0" eaLnBrk="1" latinLnBrk="1" hangingPunct="1">
+      <a:defRPr sz="1200" kern="1200">
+        <a:solidFill>
+          <a:schemeClr val="tx1"/>
+        </a:solidFill>
+        <a:latin typeface="+mn-lt"/>
+        <a:ea typeface="+mn-ea"/>
+        <a:cs typeface="+mn-cs"/>
+      </a:defRPr>
+    </a:lvl7pPr>
+    <a:lvl8pPr marL="3200400" algn="l" defTabSz="914400" rtl="0" eaLnBrk="1" latinLnBrk="1" hangingPunct="1">
+      <a:defRPr sz="1200" kern="1200">
+        <a:solidFill>
+          <a:schemeClr val="tx1"/>
+        </a:solidFill>
+        <a:latin typeface="+mn-lt"/>
+        <a:ea typeface="+mn-ea"/>
+        <a:cs typeface="+mn-cs"/>
+      </a:defRPr>
+    </a:lvl8pPr>
+    <a:lvl9pPr marL="3657600" algn="l" defTabSz="914400" rtl="0" eaLnBrk="1" latinLnBrk="1" hangingPunct="1">
+      <a:defRPr sz="1200" kern="1200">
+        <a:solidFill>
+          <a:schemeClr val="tx1"/>
+        </a:solidFill>
+        <a:latin typeface="+mn-lt"/>
+        <a:ea typeface="+mn-ea"/>
+        <a:cs typeface="+mn-cs"/>
+      </a:defRPr>
+    </a:lvl9pPr>
+  </p:notesStyle>
+</p:notesMaster>
+</file>
+
+<file path=ppt/notesSlides/notesSlide1.xml><?xml version="1.0" encoding="utf-8"?>
+<p:notes xmlns:a="http://schemas.openxmlformats.org/drawingml/2006/main" xmlns:r="http://schemas.openxmlformats.org/officeDocument/2006/relationships" xmlns:p="http://schemas.openxmlformats.org/presentationml/2006/main">
+  <p:cSld>
+    <p:spTree>
+      <p:nvGrpSpPr>
+        <p:cNvPr id="1" name=""/>
+        <p:cNvGrpSpPr/>
+        <p:nvPr/>
+      </p:nvGrpSpPr>
+      <p:grpSpPr>
+        <a:xfrm>
+          <a:off x="0" y="0"/>
+          <a:ext cx="0" cy="0"/>
+          <a:chOff x="0" y="0"/>
+          <a:chExt cx="0" cy="0"/>
+        </a:xfrm>
+      </p:grpSpPr>
+      <p:sp>
+        <p:nvSpPr>
+          <p:cNvPr id="2" name="슬라이드 이미지 개체 틀 1"/>
+          <p:cNvSpPr>
+            <a:spLocks noGrp="1" noRot="1" noChangeAspect="1"/>
+          </p:cNvSpPr>
+          <p:nvPr>
+            <p:ph type="sldImg"/>
+          </p:nvPr>
+        </p:nvSpPr>
+        <p:spPr/>
+      </p:sp>
+      <p:sp>
+        <p:nvSpPr>
+          <p:cNvPr id="3" name="슬라이드 노트 개체 틀 2"/>
+          <p:cNvSpPr>
+            <a:spLocks noGrp="1"/>
+          </p:cNvSpPr>
+          <p:nvPr>
+            <p:ph type="body" idx="1"/>
+          </p:nvPr>
+        </p:nvSpPr>
+        <p:spPr/>
+        <p:txBody>
+          <a:bodyPr/>
+          <a:lstStyle/>
+          <a:p>
+            <a:endParaRPr kumimoji="1" lang="ko-KR" altLang="en-US"/>
+          </a:p>
+        </p:txBody>
+      </p:sp>
+      <p:sp>
+        <p:nvSpPr>
+          <p:cNvPr id="4" name="슬라이드 번호 개체 틀 3"/>
+          <p:cNvSpPr>
+            <a:spLocks noGrp="1"/>
+          </p:cNvSpPr>
+          <p:nvPr>
+            <p:ph type="sldNum" sz="quarter" idx="5"/>
+          </p:nvPr>
+        </p:nvSpPr>
+        <p:spPr/>
+        <p:txBody>
+          <a:bodyPr/>
+          <a:lstStyle/>
+          <a:p>
+            <a:fld id="{996C5B66-446E-5B46-89DC-F1BF4020301F}" type="slidenum">
+              <a:rPr kumimoji="1" lang="ko-KR" altLang="en-US" smtClean="0"/>
+              <a:t>4</a:t>
+            </a:fld>
+            <a:endParaRPr kumimoji="1" lang="ko-KR" altLang="en-US"/>
+          </a:p>
+        </p:txBody>
+      </p:sp>
+    </p:spTree>
+    <p:extLst>
+      <p:ext uri="{BB962C8B-B14F-4D97-AF65-F5344CB8AC3E}">
+        <p14:creationId xmlns:p14="http://schemas.microsoft.com/office/powerpoint/2010/main" val="3644788913"/>
+      </p:ext>
+    </p:extLst>
+  </p:cSld>
+  <p:clrMapOvr>
+    <a:masterClrMapping/>
+  </p:clrMapOvr>
+</p:notes>
 </file>
 
 <file path=ppt/slideLayouts/slideLayout1.xml><?xml version="1.0" encoding="utf-8"?>
@@ -150,10 +602,9 @@
           <a:lstStyle/>
           <a:p>
             <a:r>
-              <a:rPr lang="en-US" smtClean="0"/>
+              <a:rPr lang="en-US"/>
               <a:t>Click to edit Master title style</a:t>
             </a:r>
-            <a:endParaRPr lang="en-US"/>
           </a:p>
         </p:txBody>
       </p:sp>
@@ -269,10 +720,9 @@
           </a:lstStyle>
           <a:p>
             <a:r>
-              <a:rPr lang="en-US" smtClean="0"/>
+              <a:rPr lang="en-US"/>
               <a:t>Click to edit Master subtitle style</a:t>
             </a:r>
-            <a:endParaRPr lang="en-US"/>
           </a:p>
         </p:txBody>
       </p:sp>
@@ -293,7 +743,7 @@
           <a:p>
             <a:fld id="{5BCAD085-E8A6-8845-BD4E-CB4CCA059FC4}" type="datetimeFigureOut">
               <a:rPr lang="en-US" smtClean="0"/>
-              <a:t>1/27/13</a:t>
+              <a:t>7/2/26</a:t>
             </a:fld>
             <a:endParaRPr lang="en-US"/>
           </a:p>
@@ -387,10 +837,9 @@
           <a:lstStyle/>
           <a:p>
             <a:r>
-              <a:rPr lang="en-US" smtClean="0"/>
+              <a:rPr lang="en-US"/>
               <a:t>Click to edit Master title style</a:t>
             </a:r>
-            <a:endParaRPr lang="en-US"/>
           </a:p>
         </p:txBody>
       </p:sp>
@@ -411,38 +860,37 @@
           <a:p>
             <a:pPr lvl="0"/>
             <a:r>
-              <a:rPr lang="en-US" smtClean="0"/>
+              <a:rPr lang="en-US"/>
               <a:t>Click to edit Master text styles</a:t>
             </a:r>
           </a:p>
           <a:p>
             <a:pPr lvl="1"/>
             <a:r>
-              <a:rPr lang="en-US" smtClean="0"/>
+              <a:rPr lang="en-US"/>
               <a:t>Second level</a:t>
             </a:r>
           </a:p>
           <a:p>
             <a:pPr lvl="2"/>
             <a:r>
-              <a:rPr lang="en-US" smtClean="0"/>
+              <a:rPr lang="en-US"/>
               <a:t>Third level</a:t>
             </a:r>
           </a:p>
           <a:p>
             <a:pPr lvl="3"/>
             <a:r>
-              <a:rPr lang="en-US" smtClean="0"/>
+              <a:rPr lang="en-US"/>
               <a:t>Fourth level</a:t>
             </a:r>
           </a:p>
           <a:p>
             <a:pPr lvl="4"/>
             <a:r>
-              <a:rPr lang="en-US" smtClean="0"/>
+              <a:rPr lang="en-US"/>
               <a:t>Fifth level</a:t>
             </a:r>
-            <a:endParaRPr lang="en-US"/>
           </a:p>
         </p:txBody>
       </p:sp>
@@ -463,7 +911,7 @@
           <a:p>
             <a:fld id="{5BCAD085-E8A6-8845-BD4E-CB4CCA059FC4}" type="datetimeFigureOut">
               <a:rPr lang="en-US" smtClean="0"/>
-              <a:t>1/27/13</a:t>
+              <a:t>7/2/26</a:t>
             </a:fld>
             <a:endParaRPr lang="en-US"/>
           </a:p>
@@ -562,10 +1010,9 @@
           <a:lstStyle/>
           <a:p>
             <a:r>
-              <a:rPr lang="en-US" smtClean="0"/>
+              <a:rPr lang="en-US"/>
               <a:t>Click to edit Master title style</a:t>
             </a:r>
-            <a:endParaRPr lang="en-US"/>
           </a:p>
         </p:txBody>
       </p:sp>
@@ -591,38 +1038,37 @@
           <a:p>
             <a:pPr lvl="0"/>
             <a:r>
-              <a:rPr lang="en-US" smtClean="0"/>
+              <a:rPr lang="en-US"/>
               <a:t>Click to edit Master text styles</a:t>
             </a:r>
           </a:p>
           <a:p>
             <a:pPr lvl="1"/>
             <a:r>
-              <a:rPr lang="en-US" smtClean="0"/>
+              <a:rPr lang="en-US"/>
               <a:t>Second level</a:t>
             </a:r>
           </a:p>
           <a:p>
             <a:pPr lvl="2"/>
             <a:r>
-              <a:rPr lang="en-US" smtClean="0"/>
+              <a:rPr lang="en-US"/>
               <a:t>Third level</a:t>
             </a:r>
           </a:p>
           <a:p>
             <a:pPr lvl="3"/>
             <a:r>
-              <a:rPr lang="en-US" smtClean="0"/>
+              <a:rPr lang="en-US"/>
               <a:t>Fourth level</a:t>
             </a:r>
           </a:p>
           <a:p>
             <a:pPr lvl="4"/>
             <a:r>
-              <a:rPr lang="en-US" smtClean="0"/>
+              <a:rPr lang="en-US"/>
               <a:t>Fifth level</a:t>
             </a:r>
-            <a:endParaRPr lang="en-US"/>
           </a:p>
         </p:txBody>
       </p:sp>
@@ -643,7 +1089,7 @@
           <a:p>
             <a:fld id="{5BCAD085-E8A6-8845-BD4E-CB4CCA059FC4}" type="datetimeFigureOut">
               <a:rPr lang="en-US" smtClean="0"/>
-              <a:t>1/27/13</a:t>
+              <a:t>7/2/26</a:t>
             </a:fld>
             <a:endParaRPr lang="en-US"/>
           </a:p>
@@ -737,10 +1183,9 @@
           <a:lstStyle/>
           <a:p>
             <a:r>
-              <a:rPr lang="en-US" smtClean="0"/>
+              <a:rPr lang="en-US"/>
               <a:t>Click to edit Master title style</a:t>
             </a:r>
-            <a:endParaRPr lang="en-US"/>
           </a:p>
         </p:txBody>
       </p:sp>
@@ -761,38 +1206,37 @@
           <a:p>
             <a:pPr lvl="0"/>
             <a:r>
-              <a:rPr lang="en-US" smtClean="0"/>
+              <a:rPr lang="en-US"/>
               <a:t>Click to edit Master text styles</a:t>
             </a:r>
           </a:p>
           <a:p>
             <a:pPr lvl="1"/>
             <a:r>
-              <a:rPr lang="en-US" smtClean="0"/>
+              <a:rPr lang="en-US"/>
               <a:t>Second level</a:t>
             </a:r>
           </a:p>
           <a:p>
             <a:pPr lvl="2"/>
             <a:r>
-              <a:rPr lang="en-US" smtClean="0"/>
+              <a:rPr lang="en-US"/>
               <a:t>Third level</a:t>
             </a:r>
           </a:p>
           <a:p>
             <a:pPr lvl="3"/>
             <a:r>
-              <a:rPr lang="en-US" smtClean="0"/>
+              <a:rPr lang="en-US"/>
               <a:t>Fourth level</a:t>
             </a:r>
           </a:p>
           <a:p>
             <a:pPr lvl="4"/>
             <a:r>
-              <a:rPr lang="en-US" smtClean="0"/>
+              <a:rPr lang="en-US"/>
               <a:t>Fifth level</a:t>
             </a:r>
-            <a:endParaRPr lang="en-US"/>
           </a:p>
         </p:txBody>
       </p:sp>
@@ -813,7 +1257,7 @@
           <a:p>
             <a:fld id="{5BCAD085-E8A6-8845-BD4E-CB4CCA059FC4}" type="datetimeFigureOut">
               <a:rPr lang="en-US" smtClean="0"/>
-              <a:t>1/27/13</a:t>
+              <a:t>7/2/26</a:t>
             </a:fld>
             <a:endParaRPr lang="en-US"/>
           </a:p>
@@ -916,10 +1360,9 @@
           </a:lstStyle>
           <a:p>
             <a:r>
-              <a:rPr lang="en-US" smtClean="0"/>
+              <a:rPr lang="en-US"/>
               <a:t>Click to edit Master title style</a:t>
             </a:r>
-            <a:endParaRPr lang="en-US"/>
           </a:p>
         </p:txBody>
       </p:sp>
@@ -1036,7 +1479,7 @@
           <a:p>
             <a:pPr lvl="0"/>
             <a:r>
-              <a:rPr lang="en-US" smtClean="0"/>
+              <a:rPr lang="en-US"/>
               <a:t>Click to edit Master text styles</a:t>
             </a:r>
           </a:p>
@@ -1059,7 +1502,7 @@
           <a:p>
             <a:fld id="{5BCAD085-E8A6-8845-BD4E-CB4CCA059FC4}" type="datetimeFigureOut">
               <a:rPr lang="en-US" smtClean="0"/>
-              <a:t>1/27/13</a:t>
+              <a:t>7/2/26</a:t>
             </a:fld>
             <a:endParaRPr lang="en-US"/>
           </a:p>
@@ -1153,10 +1596,9 @@
           <a:lstStyle/>
           <a:p>
             <a:r>
-              <a:rPr lang="en-US" smtClean="0"/>
+              <a:rPr lang="en-US"/>
               <a:t>Click to edit Master title style</a:t>
             </a:r>
-            <a:endParaRPr lang="en-US"/>
           </a:p>
         </p:txBody>
       </p:sp>
@@ -1210,38 +1652,37 @@
           <a:p>
             <a:pPr lvl="0"/>
             <a:r>
-              <a:rPr lang="en-US" smtClean="0"/>
+              <a:rPr lang="en-US"/>
               <a:t>Click to edit Master text styles</a:t>
             </a:r>
           </a:p>
           <a:p>
             <a:pPr lvl="1"/>
             <a:r>
-              <a:rPr lang="en-US" smtClean="0"/>
+              <a:rPr lang="en-US"/>
               <a:t>Second level</a:t>
             </a:r>
           </a:p>
           <a:p>
             <a:pPr lvl="2"/>
             <a:r>
-              <a:rPr lang="en-US" smtClean="0"/>
+              <a:rPr lang="en-US"/>
               <a:t>Third level</a:t>
             </a:r>
           </a:p>
           <a:p>
             <a:pPr lvl="3"/>
             <a:r>
-              <a:rPr lang="en-US" smtClean="0"/>
+              <a:rPr lang="en-US"/>
               <a:t>Fourth level</a:t>
             </a:r>
           </a:p>
           <a:p>
             <a:pPr lvl="4"/>
             <a:r>
-              <a:rPr lang="en-US" smtClean="0"/>
+              <a:rPr lang="en-US"/>
               <a:t>Fifth level</a:t>
             </a:r>
-            <a:endParaRPr lang="en-US"/>
           </a:p>
         </p:txBody>
       </p:sp>
@@ -1295,38 +1736,37 @@
           <a:p>
             <a:pPr lvl="0"/>
             <a:r>
-              <a:rPr lang="en-US" smtClean="0"/>
+              <a:rPr lang="en-US"/>
               <a:t>Click to edit Master text styles</a:t>
             </a:r>
           </a:p>
           <a:p>
             <a:pPr lvl="1"/>
             <a:r>
-              <a:rPr lang="en-US" smtClean="0"/>
+              <a:rPr lang="en-US"/>
               <a:t>Second level</a:t>
             </a:r>
           </a:p>
           <a:p>
             <a:pPr lvl="2"/>
             <a:r>
-              <a:rPr lang="en-US" smtClean="0"/>
+              <a:rPr lang="en-US"/>
               <a:t>Third level</a:t>
             </a:r>
           </a:p>
           <a:p>
             <a:pPr lvl="3"/>
             <a:r>
-              <a:rPr lang="en-US" smtClean="0"/>
+              <a:rPr lang="en-US"/>
               <a:t>Fourth level</a:t>
             </a:r>
           </a:p>
           <a:p>
             <a:pPr lvl="4"/>
             <a:r>
-              <a:rPr lang="en-US" smtClean="0"/>
+              <a:rPr lang="en-US"/>
               <a:t>Fifth level</a:t>
             </a:r>
-            <a:endParaRPr lang="en-US"/>
           </a:p>
         </p:txBody>
       </p:sp>
@@ -1347,7 +1787,7 @@
           <a:p>
             <a:fld id="{5BCAD085-E8A6-8845-BD4E-CB4CCA059FC4}" type="datetimeFigureOut">
               <a:rPr lang="en-US" smtClean="0"/>
-              <a:t>1/27/13</a:t>
+              <a:t>7/2/26</a:t>
             </a:fld>
             <a:endParaRPr lang="en-US"/>
           </a:p>
@@ -1445,10 +1885,9 @@
           </a:lstStyle>
           <a:p>
             <a:r>
-              <a:rPr lang="en-US" smtClean="0"/>
+              <a:rPr lang="en-US"/>
               <a:t>Click to edit Master title style</a:t>
             </a:r>
-            <a:endParaRPr lang="en-US"/>
           </a:p>
         </p:txBody>
       </p:sp>
@@ -1511,7 +1950,7 @@
           <a:p>
             <a:pPr lvl="0"/>
             <a:r>
-              <a:rPr lang="en-US" smtClean="0"/>
+              <a:rPr lang="en-US"/>
               <a:t>Click to edit Master text styles</a:t>
             </a:r>
           </a:p>
@@ -1567,38 +2006,37 @@
           <a:p>
             <a:pPr lvl="0"/>
             <a:r>
-              <a:rPr lang="en-US" smtClean="0"/>
+              <a:rPr lang="en-US"/>
               <a:t>Click to edit Master text styles</a:t>
             </a:r>
           </a:p>
           <a:p>
             <a:pPr lvl="1"/>
             <a:r>
-              <a:rPr lang="en-US" smtClean="0"/>
+              <a:rPr lang="en-US"/>
               <a:t>Second level</a:t>
             </a:r>
           </a:p>
           <a:p>
             <a:pPr lvl="2"/>
             <a:r>
-              <a:rPr lang="en-US" smtClean="0"/>
+              <a:rPr lang="en-US"/>
               <a:t>Third level</a:t>
             </a:r>
           </a:p>
           <a:p>
             <a:pPr lvl="3"/>
             <a:r>
-              <a:rPr lang="en-US" smtClean="0"/>
+              <a:rPr lang="en-US"/>
               <a:t>Fourth level</a:t>
             </a:r>
           </a:p>
           <a:p>
             <a:pPr lvl="4"/>
             <a:r>
-              <a:rPr lang="en-US" smtClean="0"/>
+              <a:rPr lang="en-US"/>
               <a:t>Fifth level</a:t>
             </a:r>
-            <a:endParaRPr lang="en-US"/>
           </a:p>
         </p:txBody>
       </p:sp>
@@ -1661,7 +2099,7 @@
           <a:p>
             <a:pPr lvl="0"/>
             <a:r>
-              <a:rPr lang="en-US" smtClean="0"/>
+              <a:rPr lang="en-US"/>
               <a:t>Click to edit Master text styles</a:t>
             </a:r>
           </a:p>
@@ -1717,38 +2155,37 @@
           <a:p>
             <a:pPr lvl="0"/>
             <a:r>
-              <a:rPr lang="en-US" smtClean="0"/>
+              <a:rPr lang="en-US"/>
               <a:t>Click to edit Master text styles</a:t>
             </a:r>
           </a:p>
           <a:p>
             <a:pPr lvl="1"/>
             <a:r>
-              <a:rPr lang="en-US" smtClean="0"/>
+              <a:rPr lang="en-US"/>
               <a:t>Second level</a:t>
             </a:r>
           </a:p>
           <a:p>
             <a:pPr lvl="2"/>
             <a:r>
-              <a:rPr lang="en-US" smtClean="0"/>
+              <a:rPr lang="en-US"/>
               <a:t>Third level</a:t>
             </a:r>
           </a:p>
           <a:p>
             <a:pPr lvl="3"/>
             <a:r>
-              <a:rPr lang="en-US" smtClean="0"/>
+              <a:rPr lang="en-US"/>
               <a:t>Fourth level</a:t>
             </a:r>
           </a:p>
           <a:p>
             <a:pPr lvl="4"/>
             <a:r>
-              <a:rPr lang="en-US" smtClean="0"/>
+              <a:rPr lang="en-US"/>
               <a:t>Fifth level</a:t>
             </a:r>
-            <a:endParaRPr lang="en-US"/>
           </a:p>
         </p:txBody>
       </p:sp>
@@ -1769,7 +2206,7 @@
           <a:p>
             <a:fld id="{5BCAD085-E8A6-8845-BD4E-CB4CCA059FC4}" type="datetimeFigureOut">
               <a:rPr lang="en-US" smtClean="0"/>
-              <a:t>1/27/13</a:t>
+              <a:t>7/2/26</a:t>
             </a:fld>
             <a:endParaRPr lang="en-US"/>
           </a:p>
@@ -1863,10 +2300,9 @@
           <a:lstStyle/>
           <a:p>
             <a:r>
-              <a:rPr lang="en-US" smtClean="0"/>
+              <a:rPr lang="en-US"/>
               <a:t>Click to edit Master title style</a:t>
             </a:r>
-            <a:endParaRPr lang="en-US"/>
           </a:p>
         </p:txBody>
       </p:sp>
@@ -1887,7 +2323,7 @@
           <a:p>
             <a:fld id="{5BCAD085-E8A6-8845-BD4E-CB4CCA059FC4}" type="datetimeFigureOut">
               <a:rPr lang="en-US" smtClean="0"/>
-              <a:t>1/27/13</a:t>
+              <a:t>7/2/26</a:t>
             </a:fld>
             <a:endParaRPr lang="en-US"/>
           </a:p>
@@ -1982,7 +2418,7 @@
           <a:p>
             <a:fld id="{5BCAD085-E8A6-8845-BD4E-CB4CCA059FC4}" type="datetimeFigureOut">
               <a:rPr lang="en-US" smtClean="0"/>
-              <a:t>1/27/13</a:t>
+              <a:t>7/2/26</a:t>
             </a:fld>
             <a:endParaRPr lang="en-US"/>
           </a:p>
@@ -2085,10 +2521,9 @@
           </a:lstStyle>
           <a:p>
             <a:r>
-              <a:rPr lang="en-US" smtClean="0"/>
+              <a:rPr lang="en-US"/>
               <a:t>Click to edit Master title style</a:t>
             </a:r>
-            <a:endParaRPr lang="en-US"/>
           </a:p>
         </p:txBody>
       </p:sp>
@@ -2142,38 +2577,37 @@
           <a:p>
             <a:pPr lvl="0"/>
             <a:r>
-              <a:rPr lang="en-US" smtClean="0"/>
+              <a:rPr lang="en-US"/>
               <a:t>Click to edit Master text styles</a:t>
             </a:r>
           </a:p>
           <a:p>
             <a:pPr lvl="1"/>
             <a:r>
-              <a:rPr lang="en-US" smtClean="0"/>
+              <a:rPr lang="en-US"/>
               <a:t>Second level</a:t>
             </a:r>
           </a:p>
           <a:p>
             <a:pPr lvl="2"/>
             <a:r>
-              <a:rPr lang="en-US" smtClean="0"/>
+              <a:rPr lang="en-US"/>
               <a:t>Third level</a:t>
             </a:r>
           </a:p>
           <a:p>
             <a:pPr lvl="3"/>
             <a:r>
-              <a:rPr lang="en-US" smtClean="0"/>
+              <a:rPr lang="en-US"/>
               <a:t>Fourth level</a:t>
             </a:r>
           </a:p>
           <a:p>
             <a:pPr lvl="4"/>
             <a:r>
-              <a:rPr lang="en-US" smtClean="0"/>
+              <a:rPr lang="en-US"/>
               <a:t>Fifth level</a:t>
             </a:r>
-            <a:endParaRPr lang="en-US"/>
           </a:p>
         </p:txBody>
       </p:sp>
@@ -2236,7 +2670,7 @@
           <a:p>
             <a:pPr lvl="0"/>
             <a:r>
-              <a:rPr lang="en-US" smtClean="0"/>
+              <a:rPr lang="en-US"/>
               <a:t>Click to edit Master text styles</a:t>
             </a:r>
           </a:p>
@@ -2259,7 +2693,7 @@
           <a:p>
             <a:fld id="{5BCAD085-E8A6-8845-BD4E-CB4CCA059FC4}" type="datetimeFigureOut">
               <a:rPr lang="en-US" smtClean="0"/>
-              <a:t>1/27/13</a:t>
+              <a:t>7/2/26</a:t>
             </a:fld>
             <a:endParaRPr lang="en-US"/>
           </a:p>
@@ -2362,10 +2796,9 @@
           </a:lstStyle>
           <a:p>
             <a:r>
-              <a:rPr lang="en-US" smtClean="0"/>
+              <a:rPr lang="en-US"/>
               <a:t>Click to edit Master title style</a:t>
             </a:r>
-            <a:endParaRPr lang="en-US"/>
           </a:p>
         </p:txBody>
       </p:sp>
@@ -2489,7 +2922,7 @@
           <a:p>
             <a:pPr lvl="0"/>
             <a:r>
-              <a:rPr lang="en-US" smtClean="0"/>
+              <a:rPr lang="en-US"/>
               <a:t>Click to edit Master text styles</a:t>
             </a:r>
           </a:p>
@@ -2512,7 +2945,7 @@
           <a:p>
             <a:fld id="{5BCAD085-E8A6-8845-BD4E-CB4CCA059FC4}" type="datetimeFigureOut">
               <a:rPr lang="en-US" smtClean="0"/>
-              <a:t>1/27/13</a:t>
+              <a:t>7/2/26</a:t>
             </a:fld>
             <a:endParaRPr lang="en-US"/>
           </a:p>
@@ -2621,10 +3054,9 @@
           <a:lstStyle/>
           <a:p>
             <a:r>
-              <a:rPr lang="en-US" smtClean="0"/>
+              <a:rPr lang="en-US"/>
               <a:t>Click to edit Master title style</a:t>
             </a:r>
-            <a:endParaRPr lang="en-US"/>
           </a:p>
         </p:txBody>
       </p:sp>
@@ -2655,38 +3087,37 @@
           <a:p>
             <a:pPr lvl="0"/>
             <a:r>
-              <a:rPr lang="en-US" smtClean="0"/>
+              <a:rPr lang="en-US"/>
               <a:t>Click to edit Master text styles</a:t>
             </a:r>
           </a:p>
           <a:p>
             <a:pPr lvl="1"/>
             <a:r>
-              <a:rPr lang="en-US" smtClean="0"/>
+              <a:rPr lang="en-US"/>
               <a:t>Second level</a:t>
             </a:r>
           </a:p>
           <a:p>
             <a:pPr lvl="2"/>
             <a:r>
-              <a:rPr lang="en-US" smtClean="0"/>
+              <a:rPr lang="en-US"/>
               <a:t>Third level</a:t>
             </a:r>
           </a:p>
           <a:p>
             <a:pPr lvl="3"/>
             <a:r>
-              <a:rPr lang="en-US" smtClean="0"/>
+              <a:rPr lang="en-US"/>
               <a:t>Fourth level</a:t>
             </a:r>
           </a:p>
           <a:p>
             <a:pPr lvl="4"/>
             <a:r>
-              <a:rPr lang="en-US" smtClean="0"/>
+              <a:rPr lang="en-US"/>
               <a:t>Fifth level</a:t>
             </a:r>
-            <a:endParaRPr lang="en-US"/>
           </a:p>
         </p:txBody>
       </p:sp>
@@ -2725,7 +3156,7 @@
           <a:p>
             <a:fld id="{5BCAD085-E8A6-8845-BD4E-CB4CCA059FC4}" type="datetimeFigureOut">
               <a:rPr lang="en-US" smtClean="0"/>
-              <a:t>1/27/13</a:t>
+              <a:t>7/2/26</a:t>
             </a:fld>
             <a:endParaRPr lang="en-US"/>
           </a:p>
@@ -3084,7 +3515,7 @@
 </file>
 
 <file path=ppt/slides/slide1.xml><?xml version="1.0" encoding="utf-8"?>
-<p:sld xmlns:a="http://schemas.openxmlformats.org/drawingml/2006/main" xmlns:p="http://schemas.openxmlformats.org/presentationml/2006/main" xmlns:r="http://schemas.openxmlformats.org/officeDocument/2006/relationships">
+<p:sld xmlns:a="http://schemas.openxmlformats.org/drawingml/2006/main" xmlns:r="http://schemas.openxmlformats.org/officeDocument/2006/relationships" xmlns:p="http://schemas.openxmlformats.org/presentationml/2006/main">
   <p:cSld>
     <p:spTree>
       <p:nvGrpSpPr>
@@ -3092,7 +3523,14 @@
         <p:cNvGrpSpPr/>
         <p:nvPr/>
       </p:nvGrpSpPr>
-      <p:grpSpPr/>
+      <p:grpSpPr>
+        <a:xfrm>
+          <a:off x="0" y="0"/>
+          <a:ext cx="0" cy="0"/>
+          <a:chOff x="0" y="0"/>
+          <a:chExt cx="0" cy="0"/>
+        </a:xfrm>
+      </p:grpSpPr>
       <p:sp>
         <p:nvSpPr>
           <p:cNvPr id="2" name="TextBox 1"/>
@@ -3217,16 +3655,13 @@
           </a:p>
           <a:p>
             <a:pPr algn="l"/>
-            <a:r>
-              <a:rPr sz="500" b="0">
-                <a:solidFill>
-                  <a:srgbClr val="333333"/>
-                </a:solidFill>
-                <a:latin typeface="맑은 고딕"/>
-                <a:ea typeface="맑은 고딕"/>
-              </a:rPr>
-              <a:t/>
-            </a:r>
+            <a:endParaRPr sz="500" b="0">
+              <a:solidFill>
+                <a:srgbClr val="333333"/>
+              </a:solidFill>
+              <a:latin typeface="맑은 고딕"/>
+              <a:ea typeface="맑은 고딕"/>
+            </a:endParaRPr>
           </a:p>
           <a:p>
             <a:pPr algn="l"/>
@@ -3265,7 +3700,7 @@
 </file>
 
 <file path=ppt/slides/slide2.xml><?xml version="1.0" encoding="utf-8"?>
-<p:sld xmlns:a="http://schemas.openxmlformats.org/drawingml/2006/main" xmlns:p="http://schemas.openxmlformats.org/presentationml/2006/main" xmlns:r="http://schemas.openxmlformats.org/officeDocument/2006/relationships">
+<p:sld xmlns:a="http://schemas.openxmlformats.org/drawingml/2006/main" xmlns:r="http://schemas.openxmlformats.org/officeDocument/2006/relationships" xmlns:p="http://schemas.openxmlformats.org/presentationml/2006/main">
   <p:cSld>
     <p:spTree>
       <p:nvGrpSpPr>
@@ -3273,7 +3708,14 @@
         <p:cNvGrpSpPr/>
         <p:nvPr/>
       </p:nvGrpSpPr>
-      <p:grpSpPr/>
+      <p:grpSpPr>
+        <a:xfrm>
+          <a:off x="0" y="0"/>
+          <a:ext cx="0" cy="0"/>
+          <a:chOff x="0" y="0"/>
+          <a:chExt cx="0" cy="0"/>
+        </a:xfrm>
+      </p:grpSpPr>
       <p:sp>
         <p:nvSpPr>
           <p:cNvPr id="2" name="TextBox 1"/>
@@ -3976,6 +4418,7 @@
           <a:lstStyle/>
           <a:p>
             <a:pPr algn="ctr"/>
+            <a:endParaRPr/>
           </a:p>
         </p:txBody>
       </p:sp>
@@ -4391,6 +4834,7 @@
           <a:lstStyle/>
           <a:p>
             <a:pPr algn="ctr"/>
+            <a:endParaRPr/>
           </a:p>
         </p:txBody>
       </p:sp>
@@ -4731,7 +5175,7 @@
 </file>
 
 <file path=ppt/slides/slide3.xml><?xml version="1.0" encoding="utf-8"?>
-<p:sld xmlns:a="http://schemas.openxmlformats.org/drawingml/2006/main" xmlns:p="http://schemas.openxmlformats.org/presentationml/2006/main" xmlns:r="http://schemas.openxmlformats.org/officeDocument/2006/relationships">
+<p:sld xmlns:a="http://schemas.openxmlformats.org/drawingml/2006/main" xmlns:r="http://schemas.openxmlformats.org/officeDocument/2006/relationships" xmlns:p="http://schemas.openxmlformats.org/presentationml/2006/main">
   <p:cSld>
     <p:spTree>
       <p:nvGrpSpPr>
@@ -4739,7 +5183,14 @@
         <p:cNvGrpSpPr/>
         <p:nvPr/>
       </p:nvGrpSpPr>
-      <p:grpSpPr/>
+      <p:grpSpPr>
+        <a:xfrm>
+          <a:off x="0" y="0"/>
+          <a:ext cx="0" cy="0"/>
+          <a:chOff x="0" y="0"/>
+          <a:chExt cx="0" cy="0"/>
+        </a:xfrm>
+      </p:grpSpPr>
       <p:sp>
         <p:nvSpPr>
           <p:cNvPr id="2" name="TextBox 1"/>
@@ -4748,7 +5199,7 @@
         </p:nvSpPr>
         <p:spPr>
           <a:xfrm>
-            <a:off x="137160" y="67056"/>
+            <a:off x="137159" y="72026"/>
             <a:ext cx="3779519" cy="152400"/>
           </a:xfrm>
           <a:prstGeom prst="rect">
@@ -4784,7 +5235,7 @@
         </p:nvSpPr>
         <p:spPr>
           <a:xfrm>
-            <a:off x="1423416" y="310896"/>
+            <a:off x="1423416" y="381001"/>
             <a:ext cx="1219200" cy="97536"/>
           </a:xfrm>
           <a:prstGeom prst="rect">
@@ -4820,7 +5271,7 @@
         </p:nvSpPr>
         <p:spPr>
           <a:xfrm>
-            <a:off x="1603247" y="432815"/>
+            <a:off x="1603247" y="502920"/>
             <a:ext cx="152400" cy="152400"/>
           </a:xfrm>
           <a:prstGeom prst="rect">
@@ -4851,7 +5302,7 @@
           </a:fontRef>
         </p:style>
         <p:txBody>
-          <a:bodyPr rtlCol="0" anchor="ctr" wrap="square" lIns="12192" rIns="12192" tIns="6096" bIns="6096"/>
+          <a:bodyPr wrap="square" lIns="12192" tIns="6096" rIns="12192" bIns="6096" rtlCol="0" anchor="ctr"/>
           <a:lstStyle/>
           <a:p>
             <a:pPr algn="ctr"/>
@@ -4876,7 +5327,7 @@
         </p:nvSpPr>
         <p:spPr>
           <a:xfrm>
-            <a:off x="1780032" y="432815"/>
+            <a:off x="1780032" y="502920"/>
             <a:ext cx="152400" cy="152400"/>
           </a:xfrm>
           <a:prstGeom prst="rect">
@@ -4907,7 +5358,7 @@
           </a:fontRef>
         </p:style>
         <p:txBody>
-          <a:bodyPr rtlCol="0" anchor="ctr" wrap="square" lIns="12192" rIns="12192" tIns="6096" bIns="6096"/>
+          <a:bodyPr wrap="square" lIns="12192" tIns="6096" rIns="12192" bIns="6096" rtlCol="0" anchor="ctr"/>
           <a:lstStyle/>
           <a:p>
             <a:pPr algn="ctr"/>
@@ -4932,7 +5383,7 @@
         </p:nvSpPr>
         <p:spPr>
           <a:xfrm>
-            <a:off x="1956815" y="432815"/>
+            <a:off x="1956815" y="502920"/>
             <a:ext cx="152400" cy="152400"/>
           </a:xfrm>
           <a:prstGeom prst="rect">
@@ -4963,7 +5414,7 @@
           </a:fontRef>
         </p:style>
         <p:txBody>
-          <a:bodyPr rtlCol="0" anchor="ctr" wrap="square" lIns="12192" rIns="12192" tIns="6096" bIns="6096"/>
+          <a:bodyPr wrap="square" lIns="12192" tIns="6096" rIns="12192" bIns="6096" rtlCol="0" anchor="ctr"/>
           <a:lstStyle/>
           <a:p>
             <a:pPr algn="ctr"/>
@@ -4988,7 +5439,7 @@
         </p:nvSpPr>
         <p:spPr>
           <a:xfrm>
-            <a:off x="2133599" y="432815"/>
+            <a:off x="2133599" y="502920"/>
             <a:ext cx="152400" cy="152400"/>
           </a:xfrm>
           <a:prstGeom prst="rect">
@@ -5019,7 +5470,7 @@
           </a:fontRef>
         </p:style>
         <p:txBody>
-          <a:bodyPr rtlCol="0" anchor="ctr" wrap="square" lIns="12192" rIns="12192" tIns="6096" bIns="6096"/>
+          <a:bodyPr wrap="square" lIns="12192" tIns="6096" rIns="12192" bIns="6096" rtlCol="0" anchor="ctr"/>
           <a:lstStyle/>
           <a:p>
             <a:pPr algn="ctr"/>
@@ -5044,7 +5495,7 @@
         </p:nvSpPr>
         <p:spPr>
           <a:xfrm>
-            <a:off x="2310383" y="432815"/>
+            <a:off x="2310383" y="502920"/>
             <a:ext cx="152400" cy="152400"/>
           </a:xfrm>
           <a:prstGeom prst="rect">
@@ -5075,7 +5526,7 @@
           </a:fontRef>
         </p:style>
         <p:txBody>
-          <a:bodyPr rtlCol="0" anchor="ctr" wrap="square" lIns="12192" rIns="12192" tIns="6096" bIns="6096"/>
+          <a:bodyPr wrap="square" lIns="12192" tIns="6096" rIns="12192" bIns="6096" rtlCol="0" anchor="ctr"/>
           <a:lstStyle/>
           <a:p>
             <a:pPr algn="ctr"/>
@@ -5095,13 +5546,15 @@
       <p:cxnSp>
         <p:nvCxnSpPr>
           <p:cNvPr id="9" name="Connector 8"/>
-          <p:cNvCxnSpPr/>
+          <p:cNvCxnSpPr>
+            <a:cxnSpLocks/>
+          </p:cNvCxnSpPr>
           <p:nvPr/>
         </p:nvCxnSpPr>
         <p:spPr>
           <a:xfrm flipH="1">
-            <a:off x="731519" y="624839"/>
-            <a:ext cx="1301496" cy="243841"/>
+            <a:off x="962392" y="680056"/>
+            <a:ext cx="1068594" cy="188624"/>
           </a:xfrm>
           <a:prstGeom prst="line">
             <a:avLst/>
@@ -5137,7 +5590,7 @@
         </p:nvSpPr>
         <p:spPr>
           <a:xfrm>
-            <a:off x="121919" y="899160"/>
+            <a:off x="337884" y="899160"/>
             <a:ext cx="1219200" cy="97536"/>
           </a:xfrm>
           <a:prstGeom prst="rect">
@@ -5173,7 +5626,7 @@
         </p:nvSpPr>
         <p:spPr>
           <a:xfrm>
-            <a:off x="301751" y="1036320"/>
+            <a:off x="517716" y="1036320"/>
             <a:ext cx="152400" cy="152400"/>
           </a:xfrm>
           <a:prstGeom prst="rect">
@@ -5204,7 +5657,7 @@
           </a:fontRef>
         </p:style>
         <p:txBody>
-          <a:bodyPr rtlCol="0" anchor="ctr" wrap="square" lIns="12192" rIns="12192" tIns="6096" bIns="6096"/>
+          <a:bodyPr wrap="square" lIns="12192" tIns="6096" rIns="12192" bIns="6096" rtlCol="0" anchor="ctr"/>
           <a:lstStyle/>
           <a:p>
             <a:pPr algn="ctr"/>
@@ -5229,7 +5682,7 @@
         </p:nvSpPr>
         <p:spPr>
           <a:xfrm>
-            <a:off x="478535" y="1036320"/>
+            <a:off x="694500" y="1036320"/>
             <a:ext cx="152400" cy="152400"/>
           </a:xfrm>
           <a:prstGeom prst="rect">
@@ -5260,7 +5713,7 @@
           </a:fontRef>
         </p:style>
         <p:txBody>
-          <a:bodyPr rtlCol="0" anchor="ctr" wrap="square" lIns="12192" rIns="12192" tIns="6096" bIns="6096"/>
+          <a:bodyPr wrap="square" lIns="12192" tIns="6096" rIns="12192" bIns="6096" rtlCol="0" anchor="ctr"/>
           <a:lstStyle/>
           <a:p>
             <a:pPr algn="ctr"/>
@@ -5285,7 +5738,7 @@
         </p:nvSpPr>
         <p:spPr>
           <a:xfrm>
-            <a:off x="655319" y="1036320"/>
+            <a:off x="871284" y="1036320"/>
             <a:ext cx="152400" cy="152400"/>
           </a:xfrm>
           <a:prstGeom prst="rect">
@@ -5316,7 +5769,7 @@
           </a:fontRef>
         </p:style>
         <p:txBody>
-          <a:bodyPr rtlCol="0" anchor="ctr" wrap="square" lIns="12192" rIns="12192" tIns="6096" bIns="6096"/>
+          <a:bodyPr wrap="square" lIns="12192" tIns="6096" rIns="12192" bIns="6096" rtlCol="0" anchor="ctr"/>
           <a:lstStyle/>
           <a:p>
             <a:pPr algn="ctr"/>
@@ -5341,7 +5794,7 @@
         </p:nvSpPr>
         <p:spPr>
           <a:xfrm>
-            <a:off x="832103" y="1036320"/>
+            <a:off x="1048068" y="1036320"/>
             <a:ext cx="152400" cy="152400"/>
           </a:xfrm>
           <a:prstGeom prst="rect">
@@ -5372,7 +5825,7 @@
           </a:fontRef>
         </p:style>
         <p:txBody>
-          <a:bodyPr rtlCol="0" anchor="ctr" wrap="square" lIns="12192" rIns="12192" tIns="6096" bIns="6096"/>
+          <a:bodyPr wrap="square" lIns="12192" tIns="6096" rIns="12192" bIns="6096" rtlCol="0" anchor="ctr"/>
           <a:lstStyle/>
           <a:p>
             <a:pPr algn="ctr"/>
@@ -5397,7 +5850,7 @@
         </p:nvSpPr>
         <p:spPr>
           <a:xfrm>
-            <a:off x="1008887" y="1036320"/>
+            <a:off x="1224852" y="1036320"/>
             <a:ext cx="152400" cy="152400"/>
           </a:xfrm>
           <a:prstGeom prst="rect">
@@ -5428,7 +5881,7 @@
           </a:fontRef>
         </p:style>
         <p:txBody>
-          <a:bodyPr rtlCol="0" anchor="ctr" wrap="square" lIns="12192" rIns="12192" tIns="6096" bIns="6096"/>
+          <a:bodyPr wrap="square" lIns="12192" tIns="6096" rIns="12192" bIns="6096" rtlCol="0" anchor="ctr"/>
           <a:lstStyle/>
           <a:p>
             <a:pPr algn="ctr"/>
@@ -5497,13 +5950,15 @@
       <p:cxnSp>
         <p:nvCxnSpPr>
           <p:cNvPr id="17" name="Connector 16"/>
-          <p:cNvCxnSpPr/>
+          <p:cNvCxnSpPr>
+            <a:cxnSpLocks/>
+          </p:cNvCxnSpPr>
           <p:nvPr/>
         </p:nvCxnSpPr>
         <p:spPr>
           <a:xfrm>
-            <a:off x="2033015" y="624839"/>
-            <a:ext cx="0" cy="243841"/>
+            <a:off x="2033015" y="680056"/>
+            <a:ext cx="0" cy="188624"/>
           </a:xfrm>
           <a:prstGeom prst="line">
             <a:avLst/>
@@ -5606,7 +6061,7 @@
           </a:fontRef>
         </p:style>
         <p:txBody>
-          <a:bodyPr rtlCol="0" anchor="ctr" wrap="square" lIns="12192" rIns="12192" tIns="6096" bIns="6096"/>
+          <a:bodyPr wrap="square" lIns="12192" tIns="6096" rIns="12192" bIns="6096" rtlCol="0" anchor="ctr"/>
           <a:lstStyle/>
           <a:p>
             <a:pPr algn="ctr"/>
@@ -5662,7 +6117,7 @@
           </a:fontRef>
         </p:style>
         <p:txBody>
-          <a:bodyPr rtlCol="0" anchor="ctr" wrap="square" lIns="12192" rIns="12192" tIns="6096" bIns="6096"/>
+          <a:bodyPr wrap="square" lIns="12192" tIns="6096" rIns="12192" bIns="6096" rtlCol="0" anchor="ctr"/>
           <a:lstStyle/>
           <a:p>
             <a:pPr algn="ctr"/>
@@ -5718,7 +6173,7 @@
           </a:fontRef>
         </p:style>
         <p:txBody>
-          <a:bodyPr rtlCol="0" anchor="ctr" wrap="square" lIns="12192" rIns="12192" tIns="6096" bIns="6096"/>
+          <a:bodyPr wrap="square" lIns="12192" tIns="6096" rIns="12192" bIns="6096" rtlCol="0" anchor="ctr"/>
           <a:lstStyle/>
           <a:p>
             <a:pPr algn="ctr"/>
@@ -5774,7 +6229,7 @@
           </a:fontRef>
         </p:style>
         <p:txBody>
-          <a:bodyPr rtlCol="0" anchor="ctr" wrap="square" lIns="12192" rIns="12192" tIns="6096" bIns="6096"/>
+          <a:bodyPr wrap="square" lIns="12192" tIns="6096" rIns="12192" bIns="6096" rtlCol="0" anchor="ctr"/>
           <a:lstStyle/>
           <a:p>
             <a:pPr algn="ctr"/>
@@ -5830,7 +6285,7 @@
           </a:fontRef>
         </p:style>
         <p:txBody>
-          <a:bodyPr rtlCol="0" anchor="ctr" wrap="square" lIns="12192" rIns="12192" tIns="6096" bIns="6096"/>
+          <a:bodyPr wrap="square" lIns="12192" tIns="6096" rIns="12192" bIns="6096" rtlCol="0" anchor="ctr"/>
           <a:lstStyle/>
           <a:p>
             <a:pPr algn="ctr"/>
@@ -6092,13 +6547,15 @@
       <p:cxnSp>
         <p:nvCxnSpPr>
           <p:cNvPr id="30" name="Connector 29"/>
-          <p:cNvCxnSpPr/>
+          <p:cNvCxnSpPr>
+            <a:cxnSpLocks/>
+          </p:cNvCxnSpPr>
           <p:nvPr/>
         </p:nvCxnSpPr>
         <p:spPr>
           <a:xfrm>
-            <a:off x="2033015" y="624839"/>
-            <a:ext cx="1289305" cy="243841"/>
+            <a:off x="2030986" y="680056"/>
+            <a:ext cx="1070622" cy="188624"/>
           </a:xfrm>
           <a:prstGeom prst="line">
             <a:avLst/>
@@ -6134,7 +6591,7 @@
         </p:nvSpPr>
         <p:spPr>
           <a:xfrm>
-            <a:off x="2712720" y="899160"/>
+            <a:off x="2528920" y="903755"/>
             <a:ext cx="1219200" cy="97536"/>
           </a:xfrm>
           <a:prstGeom prst="rect">
@@ -6170,7 +6627,7 @@
         </p:nvSpPr>
         <p:spPr>
           <a:xfrm>
-            <a:off x="2892552" y="1036320"/>
+            <a:off x="2708752" y="1040915"/>
             <a:ext cx="152400" cy="152400"/>
           </a:xfrm>
           <a:prstGeom prst="rect">
@@ -6201,7 +6658,7 @@
           </a:fontRef>
         </p:style>
         <p:txBody>
-          <a:bodyPr rtlCol="0" anchor="ctr" wrap="square" lIns="12192" rIns="12192" tIns="6096" bIns="6096"/>
+          <a:bodyPr wrap="square" lIns="12192" tIns="6096" rIns="12192" bIns="6096" rtlCol="0" anchor="ctr"/>
           <a:lstStyle/>
           <a:p>
             <a:pPr algn="ctr"/>
@@ -6226,7 +6683,7 @@
         </p:nvSpPr>
         <p:spPr>
           <a:xfrm>
-            <a:off x="3069336" y="1036320"/>
+            <a:off x="2885536" y="1040915"/>
             <a:ext cx="152400" cy="152400"/>
           </a:xfrm>
           <a:prstGeom prst="rect">
@@ -6257,7 +6714,7 @@
           </a:fontRef>
         </p:style>
         <p:txBody>
-          <a:bodyPr rtlCol="0" anchor="ctr" wrap="square" lIns="12192" rIns="12192" tIns="6096" bIns="6096"/>
+          <a:bodyPr wrap="square" lIns="12192" tIns="6096" rIns="12192" bIns="6096" rtlCol="0" anchor="ctr"/>
           <a:lstStyle/>
           <a:p>
             <a:pPr algn="ctr"/>
@@ -6282,7 +6739,7 @@
         </p:nvSpPr>
         <p:spPr>
           <a:xfrm>
-            <a:off x="3246120" y="1036320"/>
+            <a:off x="3062320" y="1040915"/>
             <a:ext cx="152400" cy="152400"/>
           </a:xfrm>
           <a:prstGeom prst="rect">
@@ -6313,7 +6770,7 @@
           </a:fontRef>
         </p:style>
         <p:txBody>
-          <a:bodyPr rtlCol="0" anchor="ctr" wrap="square" lIns="12192" rIns="12192" tIns="6096" bIns="6096"/>
+          <a:bodyPr wrap="square" lIns="12192" tIns="6096" rIns="12192" bIns="6096" rtlCol="0" anchor="ctr"/>
           <a:lstStyle/>
           <a:p>
             <a:pPr algn="ctr"/>
@@ -6338,7 +6795,7 @@
         </p:nvSpPr>
         <p:spPr>
           <a:xfrm>
-            <a:off x="3422904" y="1036320"/>
+            <a:off x="3239104" y="1040915"/>
             <a:ext cx="152400" cy="152400"/>
           </a:xfrm>
           <a:prstGeom prst="rect">
@@ -6369,7 +6826,7 @@
           </a:fontRef>
         </p:style>
         <p:txBody>
-          <a:bodyPr rtlCol="0" anchor="ctr" wrap="square" lIns="12192" rIns="12192" tIns="6096" bIns="6096"/>
+          <a:bodyPr wrap="square" lIns="12192" tIns="6096" rIns="12192" bIns="6096" rtlCol="0" anchor="ctr"/>
           <a:lstStyle/>
           <a:p>
             <a:pPr algn="ctr"/>
@@ -6394,7 +6851,7 @@
         </p:nvSpPr>
         <p:spPr>
           <a:xfrm>
-            <a:off x="3599688" y="1036320"/>
+            <a:off x="3415888" y="1040915"/>
             <a:ext cx="152400" cy="152400"/>
           </a:xfrm>
           <a:prstGeom prst="rect">
@@ -6425,7 +6882,7 @@
           </a:fontRef>
         </p:style>
         <p:txBody>
-          <a:bodyPr rtlCol="0" anchor="ctr" wrap="square" lIns="12192" rIns="12192" tIns="6096" bIns="6096"/>
+          <a:bodyPr wrap="square" lIns="12192" tIns="6096" rIns="12192" bIns="6096" rtlCol="0" anchor="ctr"/>
           <a:lstStyle/>
           <a:p>
             <a:pPr algn="ctr"/>
@@ -6549,7 +7006,7 @@
 </file>
 
 <file path=ppt/slides/slide4.xml><?xml version="1.0" encoding="utf-8"?>
-<p:sld xmlns:a="http://schemas.openxmlformats.org/drawingml/2006/main" xmlns:p="http://schemas.openxmlformats.org/presentationml/2006/main" xmlns:r="http://schemas.openxmlformats.org/officeDocument/2006/relationships">
+<p:sld xmlns:a="http://schemas.openxmlformats.org/drawingml/2006/main" xmlns:r="http://schemas.openxmlformats.org/officeDocument/2006/relationships" xmlns:p="http://schemas.openxmlformats.org/presentationml/2006/main">
   <p:cSld>
     <p:spTree>
       <p:nvGrpSpPr>
@@ -6557,7 +7014,14 @@
         <p:cNvGrpSpPr/>
         <p:nvPr/>
       </p:nvGrpSpPr>
-      <p:grpSpPr/>
+      <p:grpSpPr>
+        <a:xfrm>
+          <a:off x="0" y="0"/>
+          <a:ext cx="0" cy="0"/>
+          <a:chOff x="0" y="0"/>
+          <a:chExt cx="0" cy="0"/>
+        </a:xfrm>
+      </p:grpSpPr>
       <p:sp>
         <p:nvSpPr>
           <p:cNvPr id="2" name="TextBox 1"/>
@@ -6602,7 +7066,7 @@
         </p:nvSpPr>
         <p:spPr>
           <a:xfrm>
-            <a:off x="213359" y="609600"/>
+            <a:off x="503914" y="607974"/>
             <a:ext cx="579120" cy="365759"/>
           </a:xfrm>
           <a:prstGeom prst="roundRect">
@@ -6635,25 +7099,52 @@
           </a:fontRef>
         </p:style>
         <p:txBody>
-          <a:bodyPr rtlCol="0" anchor="ctr" wrap="square" lIns="12192" rIns="12192" tIns="6096" bIns="6096"/>
-          <a:lstStyle/>
-          <a:p>
-            <a:pPr algn="ctr"/>
-            <a:r>
-              <a:rPr sz="416" b="1">
+          <a:bodyPr wrap="square" lIns="12192" tIns="6096" rIns="12192" bIns="6096" rtlCol="0" anchor="ctr"/>
+          <a:lstStyle/>
+          <a:p>
+            <a:pPr algn="ctr"/>
+            <a:r>
+              <a:rPr sz="416" b="1" dirty="0" err="1">
                 <a:solidFill>
                   <a:srgbClr val="333333"/>
                 </a:solidFill>
                 <a:latin typeface="맑은 고딕"/>
                 <a:ea typeface="맑은 고딕"/>
               </a:rPr>
-              <a:t>입력 수열</a:t>
-            </a:r>
-          </a:p>
-          <a:p>
-            <a:pPr algn="ctr"/>
-            <a:r>
-              <a:rPr sz="400" b="0">
+              <a:t>입력</a:t>
+            </a:r>
+            <a:r>
+              <a:rPr sz="416" b="1" dirty="0">
+                <a:solidFill>
+                  <a:srgbClr val="333333"/>
+                </a:solidFill>
+                <a:latin typeface="맑은 고딕"/>
+                <a:ea typeface="맑은 고딕"/>
+              </a:rPr>
+              <a:t> </a:t>
+            </a:r>
+            <a:r>
+              <a:rPr sz="416" b="1" dirty="0" err="1">
+                <a:solidFill>
+                  <a:srgbClr val="333333"/>
+                </a:solidFill>
+                <a:latin typeface="맑은 고딕"/>
+                <a:ea typeface="맑은 고딕"/>
+              </a:rPr>
+              <a:t>수열</a:t>
+            </a:r>
+            <a:endParaRPr sz="416" b="1" dirty="0">
+              <a:solidFill>
+                <a:srgbClr val="333333"/>
+              </a:solidFill>
+              <a:latin typeface="맑은 고딕"/>
+              <a:ea typeface="맑은 고딕"/>
+            </a:endParaRPr>
+          </a:p>
+          <a:p>
+            <a:pPr algn="ctr"/>
+            <a:r>
+              <a:rPr sz="400" b="0" dirty="0">
                 <a:solidFill>
                   <a:srgbClr val="777777"/>
                 </a:solidFill>
@@ -6706,12 +7197,12 @@
           </a:fontRef>
         </p:style>
         <p:txBody>
-          <a:bodyPr rtlCol="0" anchor="ctr" wrap="square" lIns="12192" rIns="12192" tIns="6096" bIns="6096"/>
-          <a:lstStyle/>
-          <a:p>
-            <a:pPr algn="ctr"/>
-            <a:r>
-              <a:rPr sz="433" b="1">
+          <a:bodyPr wrap="square" lIns="12192" tIns="6096" rIns="12192" bIns="6096" rtlCol="0" anchor="ctr"/>
+          <a:lstStyle/>
+          <a:p>
+            <a:pPr algn="ctr"/>
+            <a:r>
+              <a:rPr sz="433" b="1" dirty="0">
                 <a:solidFill>
                   <a:srgbClr val="333333"/>
                 </a:solidFill>
@@ -6724,15 +7215,72 @@
           <a:p>
             <a:pPr algn="ctr"/>
             <a:r>
-              <a:rPr sz="400" b="0">
+              <a:rPr sz="400" b="0" dirty="0" err="1">
                 <a:solidFill>
                   <a:srgbClr val="777777"/>
                 </a:solidFill>
                 <a:latin typeface="맑은 고딕"/>
                 <a:ea typeface="맑은 고딕"/>
               </a:rPr>
-              <a:t>입력 전체를 문맥 표현으로 압축</a:t>
-            </a:r>
+              <a:t>입력</a:t>
+            </a:r>
+            <a:r>
+              <a:rPr sz="400" b="0" dirty="0">
+                <a:solidFill>
+                  <a:srgbClr val="777777"/>
+                </a:solidFill>
+                <a:latin typeface="맑은 고딕"/>
+                <a:ea typeface="맑은 고딕"/>
+              </a:rPr>
+              <a:t> </a:t>
+            </a:r>
+            <a:r>
+              <a:rPr sz="400" b="0" dirty="0" err="1">
+                <a:solidFill>
+                  <a:srgbClr val="777777"/>
+                </a:solidFill>
+                <a:latin typeface="맑은 고딕"/>
+                <a:ea typeface="맑은 고딕"/>
+              </a:rPr>
+              <a:t>전체를</a:t>
+            </a:r>
+            <a:r>
+              <a:rPr sz="400" b="0" dirty="0">
+                <a:solidFill>
+                  <a:srgbClr val="777777"/>
+                </a:solidFill>
+                <a:latin typeface="맑은 고딕"/>
+                <a:ea typeface="맑은 고딕"/>
+              </a:rPr>
+              <a:t> </a:t>
+            </a:r>
+            <a:r>
+              <a:rPr lang="ko-KR" altLang="en-US" sz="400" b="0" dirty="0" err="1">
+                <a:solidFill>
+                  <a:srgbClr val="777777"/>
+                </a:solidFill>
+                <a:latin typeface="맑은 고딕"/>
+                <a:ea typeface="맑은 고딕"/>
+              </a:rPr>
+              <a:t>백터로</a:t>
+            </a:r>
+            <a:r>
+              <a:rPr lang="ko-KR" altLang="en-US" sz="400" b="0" dirty="0">
+                <a:solidFill>
+                  <a:srgbClr val="777777"/>
+                </a:solidFill>
+                <a:latin typeface="맑은 고딕"/>
+                <a:ea typeface="맑은 고딕"/>
+              </a:rPr>
+              <a:t> 변환</a:t>
+            </a:r>
+            <a:endParaRPr sz="400" b="0" dirty="0">
+              <a:solidFill>
+                <a:srgbClr val="777777"/>
+              </a:solidFill>
+              <a:latin typeface="맑은 고딕"/>
+              <a:ea typeface="맑은 고딕"/>
+            </a:endParaRPr>
           </a:p>
         </p:txBody>
       </p:sp>
@@ -6744,7 +7292,7 @@
         </p:nvSpPr>
         <p:spPr>
           <a:xfrm>
-            <a:off x="2225040" y="609600"/>
+            <a:off x="2042160" y="609598"/>
             <a:ext cx="792480" cy="365759"/>
           </a:xfrm>
           <a:prstGeom prst="roundRect">
@@ -6777,12 +7325,12 @@
           </a:fontRef>
         </p:style>
         <p:txBody>
-          <a:bodyPr rtlCol="0" anchor="ctr" wrap="square" lIns="12192" rIns="12192" tIns="6096" bIns="6096"/>
-          <a:lstStyle/>
-          <a:p>
-            <a:pPr algn="ctr"/>
-            <a:r>
-              <a:rPr sz="433" b="1">
+          <a:bodyPr wrap="square" lIns="12192" tIns="6096" rIns="12192" bIns="6096" rtlCol="0" anchor="ctr"/>
+          <a:lstStyle/>
+          <a:p>
+            <a:pPr algn="ctr"/>
+            <a:r>
+              <a:rPr sz="433" b="1" dirty="0">
                 <a:solidFill>
                   <a:srgbClr val="333333"/>
                 </a:solidFill>
@@ -6795,15 +7343,62 @@
           <a:p>
             <a:pPr algn="ctr"/>
             <a:r>
-              <a:rPr sz="400" b="0">
+              <a:rPr sz="400" b="0" dirty="0" err="1">
                 <a:solidFill>
                   <a:srgbClr val="777777"/>
                 </a:solidFill>
                 <a:latin typeface="맑은 고딕"/>
                 <a:ea typeface="맑은 고딕"/>
               </a:rPr>
-              <a:t>출력을 한 토큰씩 자기회귀적으로 생성</a:t>
-            </a:r>
+              <a:t>출력을</a:t>
+            </a:r>
+            <a:r>
+              <a:rPr sz="400" b="0" dirty="0">
+                <a:solidFill>
+                  <a:srgbClr val="777777"/>
+                </a:solidFill>
+                <a:latin typeface="맑은 고딕"/>
+                <a:ea typeface="맑은 고딕"/>
+              </a:rPr>
+              <a:t> </a:t>
+            </a:r>
+            <a:r>
+              <a:rPr sz="400" b="0" dirty="0" err="1">
+                <a:solidFill>
+                  <a:srgbClr val="777777"/>
+                </a:solidFill>
+                <a:latin typeface="맑은 고딕"/>
+                <a:ea typeface="맑은 고딕"/>
+              </a:rPr>
+              <a:t>자기회귀적으로</a:t>
+            </a:r>
+            <a:r>
+              <a:rPr sz="400" b="0" dirty="0">
+                <a:solidFill>
+                  <a:srgbClr val="777777"/>
+                </a:solidFill>
+                <a:latin typeface="맑은 고딕"/>
+                <a:ea typeface="맑은 고딕"/>
+              </a:rPr>
+              <a:t> </a:t>
+            </a:r>
+            <a:r>
+              <a:rPr sz="400" b="0" dirty="0" err="1">
+                <a:solidFill>
+                  <a:srgbClr val="777777"/>
+                </a:solidFill>
+                <a:latin typeface="맑은 고딕"/>
+                <a:ea typeface="맑은 고딕"/>
+              </a:rPr>
+              <a:t>생성</a:t>
+            </a:r>
+            <a:endParaRPr sz="400" b="0" dirty="0">
+              <a:solidFill>
+                <a:srgbClr val="777777"/>
+              </a:solidFill>
+              <a:latin typeface="맑은 고딕"/>
+              <a:ea typeface="맑은 고딕"/>
+            </a:endParaRPr>
           </a:p>
         </p:txBody>
       </p:sp>
@@ -6815,7 +7410,7 @@
         </p:nvSpPr>
         <p:spPr>
           <a:xfrm>
-            <a:off x="3322320" y="609600"/>
+            <a:off x="2972949" y="607973"/>
             <a:ext cx="579120" cy="365759"/>
           </a:xfrm>
           <a:prstGeom prst="roundRect">
@@ -6848,25 +7443,52 @@
           </a:fontRef>
         </p:style>
         <p:txBody>
-          <a:bodyPr rtlCol="0" anchor="ctr" wrap="square" lIns="12192" rIns="12192" tIns="6096" bIns="6096"/>
-          <a:lstStyle/>
-          <a:p>
-            <a:pPr algn="ctr"/>
-            <a:r>
-              <a:rPr sz="416" b="1">
+          <a:bodyPr wrap="square" lIns="12192" tIns="6096" rIns="12192" bIns="6096" rtlCol="0" anchor="ctr"/>
+          <a:lstStyle/>
+          <a:p>
+            <a:pPr algn="ctr"/>
+            <a:r>
+              <a:rPr sz="416" b="1" dirty="0" err="1">
                 <a:solidFill>
                   <a:srgbClr val="333333"/>
                 </a:solidFill>
                 <a:latin typeface="맑은 고딕"/>
                 <a:ea typeface="맑은 고딕"/>
               </a:rPr>
-              <a:t>출력 수열</a:t>
-            </a:r>
-          </a:p>
-          <a:p>
-            <a:pPr algn="ctr"/>
-            <a:r>
-              <a:rPr sz="400" b="0">
+              <a:t>출력</a:t>
+            </a:r>
+            <a:r>
+              <a:rPr sz="416" b="1" dirty="0">
+                <a:solidFill>
+                  <a:srgbClr val="333333"/>
+                </a:solidFill>
+                <a:latin typeface="맑은 고딕"/>
+                <a:ea typeface="맑은 고딕"/>
+              </a:rPr>
+              <a:t> </a:t>
+            </a:r>
+            <a:r>
+              <a:rPr sz="416" b="1" dirty="0" err="1">
+                <a:solidFill>
+                  <a:srgbClr val="333333"/>
+                </a:solidFill>
+                <a:latin typeface="맑은 고딕"/>
+                <a:ea typeface="맑은 고딕"/>
+              </a:rPr>
+              <a:t>수열</a:t>
+            </a:r>
+            <a:endParaRPr sz="416" b="1" dirty="0">
+              <a:solidFill>
+                <a:srgbClr val="333333"/>
+              </a:solidFill>
+              <a:latin typeface="맑은 고딕"/>
+              <a:ea typeface="맑은 고딕"/>
+            </a:endParaRPr>
+          </a:p>
+          <a:p>
+            <a:pPr algn="ctr"/>
+            <a:r>
+              <a:rPr sz="400" b="0" dirty="0">
                 <a:solidFill>
                   <a:srgbClr val="777777"/>
                 </a:solidFill>
@@ -6881,13 +7503,16 @@
       <p:cxnSp>
         <p:nvCxnSpPr>
           <p:cNvPr id="7" name="Connector 6"/>
-          <p:cNvCxnSpPr/>
+          <p:cNvCxnSpPr>
+            <a:cxnSpLocks/>
+            <a:stCxn id="3" idx="3"/>
+          </p:cNvCxnSpPr>
           <p:nvPr/>
         </p:nvCxnSpPr>
         <p:spPr>
           <a:xfrm>
-            <a:off x="792480" y="792480"/>
-            <a:ext cx="426720" cy="0"/>
+            <a:off x="1083034" y="790854"/>
+            <a:ext cx="136166" cy="1626"/>
           </a:xfrm>
           <a:prstGeom prst="line">
             <a:avLst/>
@@ -6918,13 +7543,15 @@
       <p:cxnSp>
         <p:nvCxnSpPr>
           <p:cNvPr id="8" name="Connector 7"/>
-          <p:cNvCxnSpPr/>
+          <p:cNvCxnSpPr>
+            <a:cxnSpLocks/>
+          </p:cNvCxnSpPr>
           <p:nvPr/>
         </p:nvCxnSpPr>
         <p:spPr>
           <a:xfrm>
             <a:off x="1920239" y="792480"/>
-            <a:ext cx="304801" cy="0"/>
+            <a:ext cx="121920" cy="0"/>
           </a:xfrm>
           <a:prstGeom prst="line">
             <a:avLst/>
@@ -6955,18 +7582,20 @@
       <p:cxnSp>
         <p:nvCxnSpPr>
           <p:cNvPr id="9" name="Connector 8"/>
-          <p:cNvCxnSpPr/>
+          <p:cNvCxnSpPr>
+            <a:cxnSpLocks/>
+          </p:cNvCxnSpPr>
           <p:nvPr/>
         </p:nvCxnSpPr>
         <p:spPr>
           <a:xfrm>
-            <a:off x="3017520" y="792480"/>
-            <a:ext cx="304800" cy="0"/>
+            <a:off x="2834640" y="790853"/>
+            <a:ext cx="138309" cy="0"/>
           </a:xfrm>
           <a:prstGeom prst="line">
             <a:avLst/>
           </a:prstGeom>
-          <a:ln w="7408">
+          <a:ln w="7407">
             <a:solidFill>
               <a:srgbClr val="333333"/>
             </a:solidFill>
@@ -6997,7 +7626,7 @@
         </p:nvSpPr>
         <p:spPr>
           <a:xfrm>
-            <a:off x="1005839" y="1402080"/>
+            <a:off x="1097280" y="1280160"/>
             <a:ext cx="761999" cy="243840"/>
           </a:xfrm>
           <a:prstGeom prst="roundRect">
@@ -7030,12 +7659,12 @@
           </a:fontRef>
         </p:style>
         <p:txBody>
-          <a:bodyPr rtlCol="0" anchor="ctr" wrap="square" lIns="12192" rIns="12192" tIns="6096" bIns="6096"/>
-          <a:lstStyle/>
-          <a:p>
-            <a:pPr algn="ctr"/>
-            <a:r>
-              <a:rPr sz="400" b="1">
+          <a:bodyPr wrap="square" lIns="12192" tIns="6096" rIns="12192" bIns="6096" rtlCol="0" anchor="ctr"/>
+          <a:lstStyle/>
+          <a:p>
+            <a:pPr algn="ctr"/>
+            <a:r>
+              <a:rPr sz="400" b="1" dirty="0">
                 <a:solidFill>
                   <a:srgbClr val="333333"/>
                 </a:solidFill>
@@ -7048,15 +7677,62 @@
           <a:p>
             <a:pPr algn="ctr"/>
             <a:r>
-              <a:rPr sz="400" b="0">
+              <a:rPr sz="400" b="0" dirty="0" err="1">
                 <a:solidFill>
                   <a:srgbClr val="777777"/>
                 </a:solidFill>
                 <a:latin typeface="맑은 고딕"/>
                 <a:ea typeface="맑은 고딕"/>
               </a:rPr>
-              <a:t>값 정보 담당</a:t>
-            </a:r>
+              <a:t>값</a:t>
+            </a:r>
+            <a:r>
+              <a:rPr sz="400" b="0" dirty="0">
+                <a:solidFill>
+                  <a:srgbClr val="777777"/>
+                </a:solidFill>
+                <a:latin typeface="맑은 고딕"/>
+                <a:ea typeface="맑은 고딕"/>
+              </a:rPr>
+              <a:t> </a:t>
+            </a:r>
+            <a:r>
+              <a:rPr sz="400" b="0" dirty="0" err="1">
+                <a:solidFill>
+                  <a:srgbClr val="777777"/>
+                </a:solidFill>
+                <a:latin typeface="맑은 고딕"/>
+                <a:ea typeface="맑은 고딕"/>
+              </a:rPr>
+              <a:t>정보</a:t>
+            </a:r>
+            <a:r>
+              <a:rPr sz="400" b="0" dirty="0">
+                <a:solidFill>
+                  <a:srgbClr val="777777"/>
+                </a:solidFill>
+                <a:latin typeface="맑은 고딕"/>
+                <a:ea typeface="맑은 고딕"/>
+              </a:rPr>
+              <a:t> </a:t>
+            </a:r>
+            <a:r>
+              <a:rPr sz="400" b="0" dirty="0" err="1">
+                <a:solidFill>
+                  <a:srgbClr val="777777"/>
+                </a:solidFill>
+                <a:latin typeface="맑은 고딕"/>
+                <a:ea typeface="맑은 고딕"/>
+              </a:rPr>
+              <a:t>담당</a:t>
+            </a:r>
+            <a:endParaRPr sz="400" b="0" dirty="0">
+              <a:solidFill>
+                <a:srgbClr val="777777"/>
+              </a:solidFill>
+              <a:latin typeface="맑은 고딕"/>
+              <a:ea typeface="맑은 고딕"/>
+            </a:endParaRPr>
           </a:p>
         </p:txBody>
       </p:sp>
@@ -7068,8 +7744,8 @@
         </p:nvSpPr>
         <p:spPr>
           <a:xfrm>
-            <a:off x="2011679" y="1402080"/>
-            <a:ext cx="883919" cy="243840"/>
+            <a:off x="2011679" y="1280160"/>
+            <a:ext cx="761999" cy="243840"/>
           </a:xfrm>
           <a:prstGeom prst="roundRect">
             <a:avLst>
@@ -7101,7 +7777,7 @@
           </a:fontRef>
         </p:style>
         <p:txBody>
-          <a:bodyPr rtlCol="0" anchor="ctr" wrap="square" lIns="12192" rIns="12192" tIns="6096" bIns="6096"/>
+          <a:bodyPr wrap="square" lIns="12192" tIns="6096" rIns="12192" bIns="6096" rtlCol="0" anchor="ctr"/>
           <a:lstStyle/>
           <a:p>
             <a:pPr algn="ctr"/>
@@ -7134,13 +7810,16 @@
       <p:cxnSp>
         <p:nvCxnSpPr>
           <p:cNvPr id="12" name="Connector 11"/>
-          <p:cNvCxnSpPr/>
+          <p:cNvCxnSpPr>
+            <a:cxnSpLocks/>
+            <a:stCxn id="10" idx="0"/>
+          </p:cNvCxnSpPr>
           <p:nvPr/>
         </p:nvCxnSpPr>
         <p:spPr>
-          <a:xfrm flipV="1">
-            <a:off x="1310639" y="975360"/>
-            <a:ext cx="121921" cy="426720"/>
+          <a:xfrm flipH="1" flipV="1">
+            <a:off x="1432560" y="975360"/>
+            <a:ext cx="45720" cy="304800"/>
           </a:xfrm>
           <a:prstGeom prst="line">
             <a:avLst/>
@@ -7171,13 +7850,15 @@
       <p:cxnSp>
         <p:nvCxnSpPr>
           <p:cNvPr id="13" name="Connector 12"/>
-          <p:cNvCxnSpPr/>
+          <p:cNvCxnSpPr>
+            <a:cxnSpLocks/>
+          </p:cNvCxnSpPr>
           <p:nvPr/>
         </p:nvCxnSpPr>
         <p:spPr>
           <a:xfrm flipV="1">
-            <a:off x="1615440" y="975360"/>
-            <a:ext cx="853439" cy="426720"/>
+            <a:off x="1765005" y="973732"/>
+            <a:ext cx="471376" cy="306425"/>
           </a:xfrm>
           <a:prstGeom prst="line">
             <a:avLst/>
@@ -7208,13 +7889,15 @@
       <p:cxnSp>
         <p:nvCxnSpPr>
           <p:cNvPr id="14" name="Connector 13"/>
-          <p:cNvCxnSpPr/>
+          <p:cNvCxnSpPr>
+            <a:cxnSpLocks/>
+          </p:cNvCxnSpPr>
           <p:nvPr/>
         </p:nvCxnSpPr>
         <p:spPr>
           <a:xfrm flipH="1" flipV="1">
             <a:off x="1706879" y="975360"/>
-            <a:ext cx="609601" cy="426720"/>
+            <a:ext cx="428864" cy="304797"/>
           </a:xfrm>
           <a:prstGeom prst="line">
             <a:avLst/>
@@ -7245,13 +7928,16 @@
       <p:cxnSp>
         <p:nvCxnSpPr>
           <p:cNvPr id="15" name="Connector 14"/>
-          <p:cNvCxnSpPr/>
+          <p:cNvCxnSpPr>
+            <a:cxnSpLocks/>
+            <a:stCxn id="11" idx="0"/>
+          </p:cNvCxnSpPr>
           <p:nvPr/>
         </p:nvCxnSpPr>
         <p:spPr>
           <a:xfrm flipV="1">
-            <a:off x="2621279" y="975360"/>
-            <a:ext cx="121921" cy="426720"/>
+            <a:off x="2392679" y="975360"/>
+            <a:ext cx="350521" cy="304800"/>
           </a:xfrm>
           <a:prstGeom prst="line">
             <a:avLst/>
@@ -7337,7 +8023,7 @@
 </file>
 
 <file path=ppt/slides/slide5.xml><?xml version="1.0" encoding="utf-8"?>
-<p:sld xmlns:a="http://schemas.openxmlformats.org/drawingml/2006/main" xmlns:p="http://schemas.openxmlformats.org/presentationml/2006/main" xmlns:r="http://schemas.openxmlformats.org/officeDocument/2006/relationships">
+<p:sld xmlns:a="http://schemas.openxmlformats.org/drawingml/2006/main" xmlns:r="http://schemas.openxmlformats.org/officeDocument/2006/relationships" xmlns:p="http://schemas.openxmlformats.org/presentationml/2006/main">
   <p:cSld>
     <p:spTree>
       <p:nvGrpSpPr>
@@ -7345,7 +8031,14 @@
         <p:cNvGrpSpPr/>
         <p:nvPr/>
       </p:nvGrpSpPr>
-      <p:grpSpPr/>
+      <p:grpSpPr>
+        <a:xfrm>
+          <a:off x="0" y="0"/>
+          <a:ext cx="0" cy="0"/>
+          <a:chOff x="0" y="0"/>
+          <a:chExt cx="0" cy="0"/>
+        </a:xfrm>
+      </p:grpSpPr>
       <p:sp>
         <p:nvSpPr>
           <p:cNvPr id="2" name="TextBox 1"/>
@@ -7423,10 +8116,11 @@
           </a:fontRef>
         </p:style>
         <p:txBody>
-          <a:bodyPr rtlCol="0" anchor="ctr" wrap="square" lIns="12192" rIns="12192" tIns="6096" bIns="6096"/>
-          <a:lstStyle/>
-          <a:p>
-            <a:pPr algn="ctr"/>
+          <a:bodyPr wrap="square" lIns="12192" tIns="6096" rIns="12192" bIns="6096" rtlCol="0" anchor="ctr"/>
+          <a:lstStyle/>
+          <a:p>
+            <a:pPr algn="ctr"/>
+            <a:endParaRPr/>
           </a:p>
         </p:txBody>
       </p:sp>
@@ -7471,10 +8165,11 @@
           </a:fontRef>
         </p:style>
         <p:txBody>
-          <a:bodyPr rtlCol="0" anchor="ctr" wrap="square" lIns="12192" rIns="12192" tIns="6096" bIns="6096"/>
-          <a:lstStyle/>
-          <a:p>
-            <a:pPr algn="ctr"/>
+          <a:bodyPr wrap="square" lIns="12192" tIns="6096" rIns="12192" bIns="6096" rtlCol="0" anchor="ctr"/>
+          <a:lstStyle/>
+          <a:p>
+            <a:pPr algn="ctr"/>
+            <a:endParaRPr/>
           </a:p>
         </p:txBody>
       </p:sp>
@@ -7519,10 +8214,11 @@
           </a:fontRef>
         </p:style>
         <p:txBody>
-          <a:bodyPr rtlCol="0" anchor="ctr" wrap="square" lIns="12192" rIns="12192" tIns="6096" bIns="6096"/>
-          <a:lstStyle/>
-          <a:p>
-            <a:pPr algn="ctr"/>
+          <a:bodyPr wrap="square" lIns="12192" tIns="6096" rIns="12192" bIns="6096" rtlCol="0" anchor="ctr"/>
+          <a:lstStyle/>
+          <a:p>
+            <a:pPr algn="ctr"/>
+            <a:endParaRPr/>
           </a:p>
         </p:txBody>
       </p:sp>
@@ -7642,6 +8338,7 @@
           <a:lstStyle/>
           <a:p>
             <a:pPr algn="ctr"/>
+            <a:endParaRPr/>
           </a:p>
         </p:txBody>
       </p:sp>
@@ -7724,6 +8421,7 @@
           <a:lstStyle/>
           <a:p>
             <a:pPr algn="ctr"/>
+            <a:endParaRPr/>
           </a:p>
         </p:txBody>
       </p:sp>
@@ -7806,6 +8504,7 @@
           <a:lstStyle/>
           <a:p>
             <a:pPr algn="ctr"/>
+            <a:endParaRPr/>
           </a:p>
         </p:txBody>
       </p:sp>
@@ -7888,6 +8587,7 @@
           <a:lstStyle/>
           <a:p>
             <a:pPr algn="ctr"/>
+            <a:endParaRPr/>
           </a:p>
         </p:txBody>
       </p:sp>
@@ -7970,6 +8670,7 @@
           <a:lstStyle/>
           <a:p>
             <a:pPr algn="ctr"/>
+            <a:endParaRPr/>
           </a:p>
         </p:txBody>
       </p:sp>
@@ -8052,6 +8753,7 @@
           <a:lstStyle/>
           <a:p>
             <a:pPr algn="ctr"/>
+            <a:endParaRPr/>
           </a:p>
         </p:txBody>
       </p:sp>
@@ -8134,6 +8836,7 @@
           <a:lstStyle/>
           <a:p>
             <a:pPr algn="ctr"/>
+            <a:endParaRPr/>
           </a:p>
         </p:txBody>
       </p:sp>
@@ -8216,6 +8919,7 @@
           <a:lstStyle/>
           <a:p>
             <a:pPr algn="ctr"/>
+            <a:endParaRPr/>
           </a:p>
         </p:txBody>
       </p:sp>
@@ -8298,6 +9002,7 @@
           <a:lstStyle/>
           <a:p>
             <a:pPr algn="ctr"/>
+            <a:endParaRPr/>
           </a:p>
         </p:txBody>
       </p:sp>
@@ -8461,7 +9166,7 @@
           </a:fontRef>
         </p:style>
         <p:txBody>
-          <a:bodyPr rtlCol="0" anchor="ctr" wrap="square"/>
+          <a:bodyPr wrap="square" rtlCol="0" anchor="ctr"/>
           <a:lstStyle/>
           <a:p>
             <a:pPr algn="ctr"/>
@@ -8530,7 +9235,7 @@
           </a:fontRef>
         </p:style>
         <p:txBody>
-          <a:bodyPr rtlCol="0" anchor="ctr" wrap="square"/>
+          <a:bodyPr wrap="square" rtlCol="0" anchor="ctr"/>
           <a:lstStyle/>
           <a:p>
             <a:pPr algn="ctr"/>
@@ -8599,7 +9304,7 @@
           </a:fontRef>
         </p:style>
         <p:txBody>
-          <a:bodyPr rtlCol="0" anchor="ctr" wrap="square"/>
+          <a:bodyPr wrap="square" rtlCol="0" anchor="ctr"/>
           <a:lstStyle/>
           <a:p>
             <a:pPr algn="ctr"/>
@@ -8789,7 +9494,7 @@
           </a:fontRef>
         </p:style>
         <p:txBody>
-          <a:bodyPr rtlCol="0" anchor="ctr" wrap="square" lIns="12192" rIns="12192" tIns="6096" bIns="6096"/>
+          <a:bodyPr wrap="square" lIns="12192" tIns="6096" rIns="12192" bIns="6096" rtlCol="0" anchor="ctr"/>
           <a:lstStyle/>
           <a:p>
             <a:pPr algn="ctr"/>
@@ -8845,7 +9550,7 @@
           </a:fontRef>
         </p:style>
         <p:txBody>
-          <a:bodyPr rtlCol="0" anchor="ctr" wrap="square" lIns="12192" rIns="12192" tIns="6096" bIns="6096"/>
+          <a:bodyPr wrap="square" lIns="12192" tIns="6096" rIns="12192" bIns="6096" rtlCol="0" anchor="ctr"/>
           <a:lstStyle/>
           <a:p>
             <a:pPr algn="ctr"/>
@@ -8901,7 +9606,7 @@
           </a:fontRef>
         </p:style>
         <p:txBody>
-          <a:bodyPr rtlCol="0" anchor="ctr" wrap="square" lIns="12192" rIns="12192" tIns="6096" bIns="6096"/>
+          <a:bodyPr wrap="square" lIns="12192" tIns="6096" rIns="12192" bIns="6096" rtlCol="0" anchor="ctr"/>
           <a:lstStyle/>
           <a:p>
             <a:pPr algn="ctr"/>
@@ -8957,7 +9662,7 @@
           </a:fontRef>
         </p:style>
         <p:txBody>
-          <a:bodyPr rtlCol="0" anchor="ctr" wrap="square" lIns="12192" rIns="12192" tIns="6096" bIns="6096"/>
+          <a:bodyPr wrap="square" lIns="12192" tIns="6096" rIns="12192" bIns="6096" rtlCol="0" anchor="ctr"/>
           <a:lstStyle/>
           <a:p>
             <a:pPr algn="ctr"/>
@@ -9013,7 +9718,7 @@
           </a:fontRef>
         </p:style>
         <p:txBody>
-          <a:bodyPr rtlCol="0" anchor="ctr" wrap="square" lIns="12192" rIns="12192" tIns="6096" bIns="6096"/>
+          <a:bodyPr wrap="square" lIns="12192" tIns="6096" rIns="12192" bIns="6096" rtlCol="0" anchor="ctr"/>
           <a:lstStyle/>
           <a:p>
             <a:pPr algn="ctr"/>
@@ -9069,7 +9774,7 @@
           </a:fontRef>
         </p:style>
         <p:txBody>
-          <a:bodyPr rtlCol="0" anchor="ctr" wrap="square" lIns="12192" rIns="12192" tIns="6096" bIns="6096"/>
+          <a:bodyPr wrap="square" lIns="12192" tIns="6096" rIns="12192" bIns="6096" rtlCol="0" anchor="ctr"/>
           <a:lstStyle/>
           <a:p>
             <a:pPr algn="ctr"/>
@@ -9125,7 +9830,7 @@
           </a:fontRef>
         </p:style>
         <p:txBody>
-          <a:bodyPr rtlCol="0" anchor="ctr" wrap="square" lIns="12192" rIns="12192" tIns="6096" bIns="6096"/>
+          <a:bodyPr wrap="square" lIns="12192" tIns="6096" rIns="12192" bIns="6096" rtlCol="0" anchor="ctr"/>
           <a:lstStyle/>
           <a:p>
             <a:pPr algn="ctr"/>
@@ -9181,7 +9886,7 @@
           </a:fontRef>
         </p:style>
         <p:txBody>
-          <a:bodyPr rtlCol="0" anchor="ctr" wrap="square" lIns="12192" rIns="12192" tIns="6096" bIns="6096"/>
+          <a:bodyPr wrap="square" lIns="12192" tIns="6096" rIns="12192" bIns="6096" rtlCol="0" anchor="ctr"/>
           <a:lstStyle/>
           <a:p>
             <a:pPr algn="ctr"/>
@@ -9237,7 +9942,7 @@
           </a:fontRef>
         </p:style>
         <p:txBody>
-          <a:bodyPr rtlCol="0" anchor="ctr" wrap="square" lIns="12192" rIns="12192" tIns="6096" bIns="6096"/>
+          <a:bodyPr wrap="square" lIns="12192" tIns="6096" rIns="12192" bIns="6096" rtlCol="0" anchor="ctr"/>
           <a:lstStyle/>
           <a:p>
             <a:pPr algn="ctr"/>
@@ -9293,7 +9998,7 @@
           </a:fontRef>
         </p:style>
         <p:txBody>
-          <a:bodyPr rtlCol="0" anchor="ctr" wrap="square" lIns="12192" rIns="12192" tIns="6096" bIns="6096"/>
+          <a:bodyPr wrap="square" lIns="12192" tIns="6096" rIns="12192" bIns="6096" rtlCol="0" anchor="ctr"/>
           <a:lstStyle/>
           <a:p>
             <a:pPr algn="ctr"/>
@@ -9612,7 +10317,7 @@
 </file>
 
 <file path=ppt/slides/slide6.xml><?xml version="1.0" encoding="utf-8"?>
-<p:sld xmlns:a="http://schemas.openxmlformats.org/drawingml/2006/main" xmlns:p="http://schemas.openxmlformats.org/presentationml/2006/main" xmlns:r="http://schemas.openxmlformats.org/officeDocument/2006/relationships">
+<p:sld xmlns:a="http://schemas.openxmlformats.org/drawingml/2006/main" xmlns:r="http://schemas.openxmlformats.org/officeDocument/2006/relationships" xmlns:p="http://schemas.openxmlformats.org/presentationml/2006/main">
   <p:cSld>
     <p:spTree>
       <p:nvGrpSpPr>
@@ -9620,7 +10325,14 @@
         <p:cNvGrpSpPr/>
         <p:nvPr/>
       </p:nvGrpSpPr>
-      <p:grpSpPr/>
+      <p:grpSpPr>
+        <a:xfrm>
+          <a:off x="0" y="0"/>
+          <a:ext cx="0" cy="0"/>
+          <a:chOff x="0" y="0"/>
+          <a:chExt cx="0" cy="0"/>
+        </a:xfrm>
+      </p:grpSpPr>
       <p:sp>
         <p:nvSpPr>
           <p:cNvPr id="2" name="TextBox 1"/>
@@ -9737,6 +10449,7 @@
           <a:lstStyle/>
           <a:p>
             <a:pPr algn="ctr"/>
+            <a:endParaRPr/>
           </a:p>
         </p:txBody>
       </p:sp>
@@ -9904,6 +10617,7 @@
           <a:lstStyle/>
           <a:p>
             <a:pPr algn="ctr"/>
+            <a:endParaRPr/>
           </a:p>
         </p:txBody>
       </p:sp>
@@ -10071,6 +10785,7 @@
           <a:lstStyle/>
           <a:p>
             <a:pPr algn="ctr"/>
+            <a:endParaRPr/>
           </a:p>
         </p:txBody>
       </p:sp>
@@ -10238,6 +10953,7 @@
           <a:lstStyle/>
           <a:p>
             <a:pPr algn="ctr"/>
+            <a:endParaRPr/>
           </a:p>
         </p:txBody>
       </p:sp>
@@ -10405,6 +11121,7 @@
           <a:lstStyle/>
           <a:p>
             <a:pPr algn="ctr"/>
+            <a:endParaRPr/>
           </a:p>
         </p:txBody>
       </p:sp>
@@ -10855,4 +11572,319 @@
   </a:objectDefaults>
   <a:extraClrSchemeLst/>
 </a:theme>
+</file>
+
+<file path=ppt/theme/theme2.xml><?xml version="1.0" encoding="utf-8"?>
+<a:theme xmlns:a="http://schemas.openxmlformats.org/drawingml/2006/main" name="Office 테마">
+  <a:themeElements>
+    <a:clrScheme name="Office">
+      <a:dk1>
+        <a:sysClr val="windowText" lastClr="000000"/>
+      </a:dk1>
+      <a:lt1>
+        <a:sysClr val="window" lastClr="FFFFFF"/>
+      </a:lt1>
+      <a:dk2>
+        <a:srgbClr val="0E2841"/>
+      </a:dk2>
+      <a:lt2>
+        <a:srgbClr val="E8E8E8"/>
+      </a:lt2>
+      <a:accent1>
+        <a:srgbClr val="156082"/>
+      </a:accent1>
+      <a:accent2>
+        <a:srgbClr val="E97132"/>
+      </a:accent2>
+      <a:accent3>
+        <a:srgbClr val="196B24"/>
+      </a:accent3>
+      <a:accent4>
+        <a:srgbClr val="0F9ED5"/>
+      </a:accent4>
+      <a:accent5>
+        <a:srgbClr val="A02B93"/>
+      </a:accent5>
+      <a:accent6>
+        <a:srgbClr val="4EA72E"/>
+      </a:accent6>
+      <a:hlink>
+        <a:srgbClr val="467886"/>
+      </a:hlink>
+      <a:folHlink>
+        <a:srgbClr val="96607D"/>
+      </a:folHlink>
+    </a:clrScheme>
+    <a:fontScheme name="Office">
+      <a:majorFont>
+        <a:latin typeface="맑은 고딕" panose="02110004020202020204"/>
+        <a:ea typeface=""/>
+        <a:cs typeface=""/>
+        <a:font script="Jpan" typeface="游ゴシック Light"/>
+        <a:font script="Hang" typeface="맑은 고딕"/>
+        <a:font script="Hans" typeface="等线 Light"/>
+        <a:font script="Hant" typeface="新細明體"/>
+        <a:font script="Arab" typeface="Times New Roman"/>
+        <a:font script="Hebr" typeface="Times New Roman"/>
+        <a:font script="Thai" typeface="Angsana New"/>
+        <a:font script="Ethi" typeface="Nyala"/>
+        <a:font script="Beng" typeface="Vrinda"/>
+        <a:font script="Gujr" typeface="Shruti"/>
+        <a:font script="Khmr" typeface="MoolBoran"/>
+        <a:font script="Knda" typeface="Tunga"/>
+        <a:font script="Guru" typeface="Raavi"/>
+        <a:font script="Cans" typeface="Euphemia"/>
+        <a:font script="Cher" typeface="Plantagenet Cherokee"/>
+        <a:font script="Yiii" typeface="Microsoft Yi Baiti"/>
+        <a:font script="Tibt" typeface="Microsoft Himalaya"/>
+        <a:font script="Thaa" typeface="MV Boli"/>
+        <a:font script="Deva" typeface="Mangal"/>
+        <a:font script="Telu" typeface="Gautami"/>
+        <a:font script="Taml" typeface="Latha"/>
+        <a:font script="Syrc" typeface="Estrangelo Edessa"/>
+        <a:font script="Orya" typeface="Kalinga"/>
+        <a:font script="Mlym" typeface="Kartika"/>
+        <a:font script="Laoo" typeface="DokChampa"/>
+        <a:font script="Sinh" typeface="Iskoola Pota"/>
+        <a:font script="Mong" typeface="Mongolian Baiti"/>
+        <a:font script="Viet" typeface="Times New Roman"/>
+        <a:font script="Uigh" typeface="Microsoft Uighur"/>
+        <a:font script="Geor" typeface="Sylfaen"/>
+        <a:font script="Armn" typeface="Arial"/>
+        <a:font script="Bugi" typeface="Leelawadee UI"/>
+        <a:font script="Bopo" typeface="Microsoft JhengHei"/>
+        <a:font script="Java" typeface="Javanese Text"/>
+        <a:font script="Lisu" typeface="Segoe UI"/>
+        <a:font script="Mymr" typeface="Myanmar Text"/>
+        <a:font script="Nkoo" typeface="Ebrima"/>
+        <a:font script="Olck" typeface="Nirmala UI"/>
+        <a:font script="Osma" typeface="Ebrima"/>
+        <a:font script="Phag" typeface="Phagspa"/>
+        <a:font script="Syrn" typeface="Estrangelo Edessa"/>
+        <a:font script="Syrj" typeface="Estrangelo Edessa"/>
+        <a:font script="Syre" typeface="Estrangelo Edessa"/>
+        <a:font script="Sora" typeface="Nirmala UI"/>
+        <a:font script="Tale" typeface="Microsoft Tai Le"/>
+        <a:font script="Talu" typeface="Microsoft New Tai Lue"/>
+        <a:font script="Tfng" typeface="Ebrima"/>
+      </a:majorFont>
+      <a:minorFont>
+        <a:latin typeface="맑은 고딕" panose="02110004020202020204"/>
+        <a:ea typeface=""/>
+        <a:cs typeface=""/>
+        <a:font script="Jpan" typeface="游ゴシック"/>
+        <a:font script="Hang" typeface="맑은 고딕"/>
+        <a:font script="Hans" typeface="等线"/>
+        <a:font script="Hant" typeface="新細明體"/>
+        <a:font script="Arab" typeface="Arial"/>
+        <a:font script="Hebr" typeface="Arial"/>
+        <a:font script="Thai" typeface="Cordia New"/>
+        <a:font script="Ethi" typeface="Nyala"/>
+        <a:font script="Beng" typeface="Vrinda"/>
+        <a:font script="Gujr" typeface="Shruti"/>
+        <a:font script="Khmr" typeface="DaunPenh"/>
+        <a:font script="Knda" typeface="Tunga"/>
+        <a:font script="Guru" typeface="Raavi"/>
+        <a:font script="Cans" typeface="Euphemia"/>
+        <a:font script="Cher" typeface="Plantagenet Cherokee"/>
+        <a:font script="Yiii" typeface="Microsoft Yi Baiti"/>
+        <a:font script="Tibt" typeface="Microsoft Himalaya"/>
+        <a:font script="Thaa" typeface="MV Boli"/>
+        <a:font script="Deva" typeface="Mangal"/>
+        <a:font script="Telu" typeface="Gautami"/>
+        <a:font script="Taml" typeface="Latha"/>
+        <a:font script="Syrc" typeface="Estrangelo Edessa"/>
+        <a:font script="Orya" typeface="Kalinga"/>
+        <a:font script="Mlym" typeface="Kartika"/>
+        <a:font script="Laoo" typeface="DokChampa"/>
+        <a:font script="Sinh" typeface="Iskoola Pota"/>
+        <a:font script="Mong" typeface="Mongolian Baiti"/>
+        <a:font script="Viet" typeface="Arial"/>
+        <a:font script="Uigh" typeface="Microsoft Uighur"/>
+        <a:font script="Geor" typeface="Sylfaen"/>
+        <a:font script="Armn" typeface="Arial"/>
+        <a:font script="Bugi" typeface="Leelawadee UI"/>
+        <a:font script="Bopo" typeface="Microsoft JhengHei"/>
+        <a:font script="Java" typeface="Javanese Text"/>
+        <a:font script="Lisu" typeface="Segoe UI"/>
+        <a:font script="Mymr" typeface="Myanmar Text"/>
+        <a:font script="Nkoo" typeface="Ebrima"/>
+        <a:font script="Olck" typeface="Nirmala UI"/>
+        <a:font script="Osma" typeface="Ebrima"/>
+        <a:font script="Phag" typeface="Phagspa"/>
+        <a:font script="Syrn" typeface="Estrangelo Edessa"/>
+        <a:font script="Syrj" typeface="Estrangelo Edessa"/>
+        <a:font script="Syre" typeface="Estrangelo Edessa"/>
+        <a:font script="Sora" typeface="Nirmala UI"/>
+        <a:font script="Tale" typeface="Microsoft Tai Le"/>
+        <a:font script="Talu" typeface="Microsoft New Tai Lue"/>
+        <a:font script="Tfng" typeface="Ebrima"/>
+      </a:minorFont>
+    </a:fontScheme>
+    <a:fmtScheme name="Office">
+      <a:fillStyleLst>
+        <a:solidFill>
+          <a:schemeClr val="phClr"/>
+        </a:solidFill>
+        <a:gradFill rotWithShape="1">
+          <a:gsLst>
+            <a:gs pos="0">
+              <a:schemeClr val="phClr">
+                <a:lumMod val="110000"/>
+                <a:satMod val="105000"/>
+                <a:tint val="67000"/>
+              </a:schemeClr>
+            </a:gs>
+            <a:gs pos="50000">
+              <a:schemeClr val="phClr">
+                <a:lumMod val="105000"/>
+                <a:satMod val="103000"/>
+                <a:tint val="73000"/>
+              </a:schemeClr>
+            </a:gs>
+            <a:gs pos="100000">
+              <a:schemeClr val="phClr">
+                <a:lumMod val="105000"/>
+                <a:satMod val="109000"/>
+                <a:tint val="81000"/>
+              </a:schemeClr>
+            </a:gs>
+          </a:gsLst>
+          <a:lin ang="5400000" scaled="0"/>
+        </a:gradFill>
+        <a:gradFill rotWithShape="1">
+          <a:gsLst>
+            <a:gs pos="0">
+              <a:schemeClr val="phClr">
+                <a:satMod val="103000"/>
+                <a:lumMod val="102000"/>
+                <a:tint val="94000"/>
+              </a:schemeClr>
+            </a:gs>
+            <a:gs pos="50000">
+              <a:schemeClr val="phClr">
+                <a:satMod val="110000"/>
+                <a:lumMod val="100000"/>
+                <a:shade val="100000"/>
+              </a:schemeClr>
+            </a:gs>
+            <a:gs pos="100000">
+              <a:schemeClr val="phClr">
+                <a:lumMod val="99000"/>
+                <a:satMod val="120000"/>
+                <a:shade val="78000"/>
+              </a:schemeClr>
+            </a:gs>
+          </a:gsLst>
+          <a:lin ang="5400000" scaled="0"/>
+        </a:gradFill>
+      </a:fillStyleLst>
+      <a:lnStyleLst>
+        <a:ln w="12700" cap="flat" cmpd="sng" algn="ctr">
+          <a:solidFill>
+            <a:schemeClr val="phClr"/>
+          </a:solidFill>
+          <a:prstDash val="solid"/>
+          <a:miter lim="800000"/>
+        </a:ln>
+        <a:ln w="19050" cap="flat" cmpd="sng" algn="ctr">
+          <a:solidFill>
+            <a:schemeClr val="phClr"/>
+          </a:solidFill>
+          <a:prstDash val="solid"/>
+          <a:miter lim="800000"/>
+        </a:ln>
+        <a:ln w="25400" cap="flat" cmpd="sng" algn="ctr">
+          <a:solidFill>
+            <a:schemeClr val="phClr"/>
+          </a:solidFill>
+          <a:prstDash val="solid"/>
+          <a:miter lim="800000"/>
+        </a:ln>
+      </a:lnStyleLst>
+      <a:effectStyleLst>
+        <a:effectStyle>
+          <a:effectLst/>
+        </a:effectStyle>
+        <a:effectStyle>
+          <a:effectLst/>
+        </a:effectStyle>
+        <a:effectStyle>
+          <a:effectLst>
+            <a:outerShdw blurRad="57150" dist="19050" dir="5400000" algn="ctr" rotWithShape="0">
+              <a:srgbClr val="000000">
+                <a:alpha val="63000"/>
+              </a:srgbClr>
+            </a:outerShdw>
+          </a:effectLst>
+        </a:effectStyle>
+      </a:effectStyleLst>
+      <a:bgFillStyleLst>
+        <a:solidFill>
+          <a:schemeClr val="phClr"/>
+        </a:solidFill>
+        <a:solidFill>
+          <a:schemeClr val="phClr">
+            <a:tint val="95000"/>
+            <a:satMod val="170000"/>
+          </a:schemeClr>
+        </a:solidFill>
+        <a:gradFill rotWithShape="1">
+          <a:gsLst>
+            <a:gs pos="0">
+              <a:schemeClr val="phClr">
+                <a:tint val="93000"/>
+                <a:satMod val="150000"/>
+                <a:shade val="98000"/>
+                <a:lumMod val="102000"/>
+              </a:schemeClr>
+            </a:gs>
+            <a:gs pos="50000">
+              <a:schemeClr val="phClr">
+                <a:tint val="98000"/>
+                <a:satMod val="130000"/>
+                <a:shade val="90000"/>
+                <a:lumMod val="103000"/>
+              </a:schemeClr>
+            </a:gs>
+            <a:gs pos="100000">
+              <a:schemeClr val="phClr">
+                <a:shade val="63000"/>
+                <a:satMod val="120000"/>
+              </a:schemeClr>
+            </a:gs>
+          </a:gsLst>
+          <a:lin ang="5400000" scaled="0"/>
+        </a:gradFill>
+      </a:bgFillStyleLst>
+    </a:fmtScheme>
+  </a:themeElements>
+  <a:objectDefaults>
+    <a:lnDef>
+      <a:spPr/>
+      <a:bodyPr/>
+      <a:lstStyle/>
+      <a:style>
+        <a:lnRef idx="2">
+          <a:schemeClr val="accent1"/>
+        </a:lnRef>
+        <a:fillRef idx="0">
+          <a:schemeClr val="accent1"/>
+        </a:fillRef>
+        <a:effectRef idx="1">
+          <a:schemeClr val="accent1"/>
+        </a:effectRef>
+        <a:fontRef idx="minor">
+          <a:schemeClr val="tx1"/>
+        </a:fontRef>
+      </a:style>
+    </a:lnDef>
+  </a:objectDefaults>
+  <a:extraClrSchemeLst/>
+  <a:extLst>
+    <a:ext uri="{05A4C25C-085E-4340-85A3-A5531E510DB2}">
+      <thm15:themeFamily xmlns:thm15="http://schemas.microsoft.com/office/thememl/2012/main" name="Office Theme" id="{2E142A2C-CD16-42D6-873A-C26D2A0506FA}" vid="{1BDDFF52-6CD6-40A5-AB3C-68EB2F1E4D0A}"/>
+    </a:ext>
+  </a:extLst>
+</a:theme>
 </file>